--- a/slides/Presentation1.pptx
+++ b/slides/Presentation1.pptx
@@ -14,6 +14,9 @@
     <p:sldId id="262" r:id="rId13"/>
     <p:sldId id="263" r:id="rId14"/>
     <p:sldId id="264" r:id="rId15"/>
+    <p:sldId id="265" r:id="rId16"/>
+    <p:sldId id="266" r:id="rId17"/>
+    <p:sldId id="267" r:id="rId18"/>
   </p:sldIdLst>
   <p:sldSz cx="12191695" cy="6858000" type="screen4x3"/>
   <p:notesSz cx="6858000" cy="9144000"/>
@@ -3156,8 +3159,8 @@
         </p:blipFill>
         <p:spPr>
           <a:xfrm>
-            <a:off x="8229600" y="274320"/>
-            <a:ext cx="3749039" cy="3749039"/>
+            <a:off x="8275320" y="320040"/>
+            <a:ext cx="3657600" cy="3657600"/>
           </a:xfrm>
           <a:prstGeom prst="rect">
             <a:avLst/>
@@ -3172,7 +3175,7 @@
         </p:nvSpPr>
         <p:spPr>
           <a:xfrm>
-            <a:off x="822960" y="1920240"/>
+            <a:off x="822960" y="1874519"/>
             <a:ext cx="10515600" cy="457200"/>
           </a:xfrm>
           <a:prstGeom prst="rect">
@@ -3211,8 +3214,8 @@
         </p:nvSpPr>
         <p:spPr>
           <a:xfrm>
-            <a:off x="822960" y="2468880"/>
-            <a:ext cx="10515600" cy="1828800"/>
+            <a:off x="822960" y="2423160"/>
+            <a:ext cx="10515600" cy="1737360"/>
           </a:xfrm>
           <a:prstGeom prst="rect">
             <a:avLst/>
@@ -3266,8 +3269,8 @@
         </p:nvSpPr>
         <p:spPr>
           <a:xfrm>
-            <a:off x="822960" y="4160520"/>
-            <a:ext cx="10058400" cy="640080"/>
+            <a:off x="822960" y="4343400"/>
+            <a:ext cx="10424160" cy="914400"/>
           </a:xfrm>
           <a:prstGeom prst="rect">
             <a:avLst/>
@@ -3282,17 +3285,33 @@
           <a:p>
             <a:pPr algn="l">
               <a:lnSpc>
-                <a:spcPct val="115000"/>
-              </a:lnSpc>
-            </a:pPr>
-            <a:r>
-              <a:rPr sz="1900" b="0" i="1">
+                <a:spcPct val="130000"/>
+              </a:lnSpc>
+            </a:pPr>
+            <a:r>
+              <a:rPr sz="1800" b="0" i="1">
                 <a:solidFill>
                   <a:srgbClr val="55503F"/>
                 </a:solidFill>
                 <a:latin typeface="Calibri"/>
               </a:rPr>
-              <a:t>Extending Smirnov &amp; Thurner (2017) with network centrality</a:t>
+              <a:t>Does where you sit in a friendship network predict your grades,</a:t>
+            </a:r>
+          </a:p>
+          <a:p>
+            <a:pPr algn="l">
+              <a:lnSpc>
+                <a:spcPct val="130000"/>
+              </a:lnSpc>
+            </a:pPr>
+            <a:r>
+              <a:rPr sz="1800" b="0" i="1">
+                <a:solidFill>
+                  <a:srgbClr val="55503F"/>
+                </a:solidFill>
+                <a:latin typeface="Calibri"/>
+              </a:rPr>
+              <a:t>beyond who your direct friends are?</a:t>
             </a:r>
           </a:p>
         </p:txBody>
@@ -3305,7 +3324,7 @@
         </p:nvSpPr>
         <p:spPr>
           <a:xfrm>
-            <a:off x="822960" y="5943600"/>
+            <a:off x="822960" y="5989320"/>
             <a:ext cx="8229600" cy="457200"/>
           </a:xfrm>
           <a:prstGeom prst="rect">
@@ -3331,7 +3350,7 @@
                 </a:solidFill>
                 <a:latin typeface="Calibri"/>
               </a:rPr>
-              <a:t>Team [names] · [Date]</a:t>
+              <a:t>Team [names]  ·  [Date]</a:t>
             </a:r>
           </a:p>
         </p:txBody>
@@ -3371,6 +3390,1570 @@
                 <a:latin typeface="Calibri"/>
               </a:rPr>
               <a:t>1</a:t>
+            </a:r>
+          </a:p>
+        </p:txBody>
+      </p:sp>
+    </p:spTree>
+  </p:cSld>
+  <p:clrMapOvr>
+    <a:masterClrMapping/>
+  </p:clrMapOvr>
+</p:sld>
+</file>
+
+<file path=ppt/slides/slide10.xml><?xml version="1.0" encoding="utf-8"?>
+<p:sld xmlns:a="http://schemas.openxmlformats.org/drawingml/2006/main" xmlns:p="http://schemas.openxmlformats.org/presentationml/2006/main" xmlns:r="http://schemas.openxmlformats.org/officeDocument/2006/relationships">
+  <p:cSld>
+    <p:spTree>
+      <p:nvGrpSpPr>
+        <p:cNvPr id="1" name=""/>
+        <p:cNvGrpSpPr/>
+        <p:nvPr/>
+      </p:nvGrpSpPr>
+      <p:grpSpPr/>
+      <p:sp>
+        <p:nvSpPr>
+          <p:cNvPr id="2" name="Rectangle 1"/>
+          <p:cNvSpPr/>
+          <p:nvPr/>
+        </p:nvSpPr>
+        <p:spPr>
+          <a:xfrm>
+            <a:off x="0" y="0"/>
+            <a:ext cx="12191695" cy="6858000"/>
+          </a:xfrm>
+          <a:prstGeom prst="rect">
+            <a:avLst/>
+          </a:prstGeom>
+          <a:solidFill>
+            <a:srgbClr val="FAF9F6"/>
+          </a:solidFill>
+          <a:ln>
+            <a:noFill/>
+          </a:ln>
+          <a:effectLst/>
+        </p:spPr>
+        <p:style>
+          <a:lnRef idx="1">
+            <a:schemeClr val="accent1"/>
+          </a:lnRef>
+          <a:fillRef idx="3">
+            <a:schemeClr val="accent1"/>
+          </a:fillRef>
+          <a:effectRef idx="2">
+            <a:schemeClr val="accent1"/>
+          </a:effectRef>
+          <a:fontRef idx="minor">
+            <a:schemeClr val="lt1"/>
+          </a:fontRef>
+        </p:style>
+        <p:txBody>
+          <a:bodyPr rtlCol="0" anchor="ctr"/>
+          <a:lstStyle/>
+          <a:p>
+            <a:pPr algn="ctr"/>
+          </a:p>
+        </p:txBody>
+      </p:sp>
+      <p:sp>
+        <p:nvSpPr>
+          <p:cNvPr id="3" name="TextBox 2"/>
+          <p:cNvSpPr txBox="1"/>
+          <p:nvPr/>
+        </p:nvSpPr>
+        <p:spPr>
+          <a:xfrm>
+            <a:off x="640080" y="365760"/>
+            <a:ext cx="10058400" cy="365760"/>
+          </a:xfrm>
+          <a:prstGeom prst="rect">
+            <a:avLst/>
+          </a:prstGeom>
+          <a:noFill/>
+        </p:spPr>
+        <p:txBody>
+          <a:bodyPr wrap="square" anchor="t">
+            <a:spAutoFit/>
+          </a:bodyPr>
+          <a:lstStyle/>
+          <a:p>
+            <a:pPr algn="l">
+              <a:lnSpc>
+                <a:spcPct val="115000"/>
+              </a:lnSpc>
+            </a:pPr>
+            <a:r>
+              <a:rPr sz="1300" b="1" i="0">
+                <a:solidFill>
+                  <a:srgbClr val="EB6834"/>
+                </a:solidFill>
+                <a:latin typeface="Calibri"/>
+              </a:rPr>
+              <a:t>IDENTIFICATION</a:t>
+            </a:r>
+          </a:p>
+        </p:txBody>
+      </p:sp>
+      <p:sp>
+        <p:nvSpPr>
+          <p:cNvPr id="4" name="TextBox 3"/>
+          <p:cNvSpPr txBox="1"/>
+          <p:nvPr/>
+        </p:nvSpPr>
+        <p:spPr>
+          <a:xfrm>
+            <a:off x="640080" y="713232"/>
+            <a:ext cx="10972800" cy="914400"/>
+          </a:xfrm>
+          <a:prstGeom prst="rect">
+            <a:avLst/>
+          </a:prstGeom>
+          <a:noFill/>
+        </p:spPr>
+        <p:txBody>
+          <a:bodyPr wrap="square" anchor="t">
+            <a:spAutoFit/>
+          </a:bodyPr>
+          <a:lstStyle/>
+          <a:p>
+            <a:pPr algn="l">
+              <a:lnSpc>
+                <a:spcPct val="108000"/>
+              </a:lnSpc>
+            </a:pPr>
+            <a:r>
+              <a:rPr sz="2700" b="1" i="0">
+                <a:solidFill>
+                  <a:srgbClr val="19180F"/>
+                </a:solidFill>
+                <a:latin typeface="Georgia"/>
+              </a:rPr>
+              <a:t>Which way does the arrow run?</a:t>
+            </a:r>
+          </a:p>
+        </p:txBody>
+      </p:sp>
+      <p:sp>
+        <p:nvSpPr>
+          <p:cNvPr id="5" name="TextBox 4"/>
+          <p:cNvSpPr txBox="1"/>
+          <p:nvPr/>
+        </p:nvSpPr>
+        <p:spPr>
+          <a:xfrm>
+            <a:off x="640080" y="1481328"/>
+            <a:ext cx="10972800" cy="685800"/>
+          </a:xfrm>
+          <a:prstGeom prst="rect">
+            <a:avLst/>
+          </a:prstGeom>
+          <a:noFill/>
+        </p:spPr>
+        <p:txBody>
+          <a:bodyPr wrap="square" anchor="t">
+            <a:spAutoFit/>
+          </a:bodyPr>
+          <a:lstStyle/>
+          <a:p>
+            <a:pPr algn="l">
+              <a:lnSpc>
+                <a:spcPct val="125000"/>
+              </a:lnSpc>
+            </a:pPr>
+            <a:r>
+              <a:rPr sz="1500" b="0" i="1">
+                <a:solidFill>
+                  <a:srgbClr val="55503F"/>
+                </a:solidFill>
+                <a:latin typeface="Calibri"/>
+              </a:rPr>
+              <a:t>Does position lift grades — or do good grades just attract friends? One snapshot can't tell. Our panel data help three ways:</a:t>
+            </a:r>
+          </a:p>
+        </p:txBody>
+      </p:sp>
+      <p:pic>
+        <p:nvPicPr>
+          <p:cNvPr id="6" name="Picture 5" descr="timeline_snapshots.png"/>
+          <p:cNvPicPr>
+            <a:picLocks noChangeAspect="1"/>
+          </p:cNvPicPr>
+          <p:nvPr/>
+        </p:nvPicPr>
+        <p:blipFill>
+          <a:blip r:embed="rId2"/>
+          <a:stretch>
+            <a:fillRect/>
+          </a:stretch>
+        </p:blipFill>
+        <p:spPr>
+          <a:xfrm>
+            <a:off x="1981047" y="2148840"/>
+            <a:ext cx="8229600" cy="2148790"/>
+          </a:xfrm>
+          <a:prstGeom prst="rect">
+            <a:avLst/>
+          </a:prstGeom>
+        </p:spPr>
+      </p:pic>
+      <p:sp>
+        <p:nvSpPr>
+          <p:cNvPr id="7" name="TextBox 6"/>
+          <p:cNvSpPr txBox="1"/>
+          <p:nvPr/>
+        </p:nvSpPr>
+        <p:spPr>
+          <a:xfrm>
+            <a:off x="914400" y="4343400"/>
+            <a:ext cx="10424160" cy="1554480"/>
+          </a:xfrm>
+          <a:prstGeom prst="rect">
+            <a:avLst/>
+          </a:prstGeom>
+          <a:noFill/>
+        </p:spPr>
+        <p:txBody>
+          <a:bodyPr wrap="square">
+            <a:spAutoFit/>
+          </a:bodyPr>
+          <a:lstStyle/>
+          <a:p>
+            <a:pPr>
+              <a:lnSpc>
+                <a:spcPct val="120000"/>
+              </a:lnSpc>
+              <a:spcAft>
+                <a:spcPts val="800"/>
+              </a:spcAft>
+            </a:pPr>
+            <a:r>
+              <a:rPr sz="1450">
+                <a:solidFill>
+                  <a:srgbClr val="19180F"/>
+                </a:solidFill>
+                <a:latin typeface="Calibri"/>
+              </a:rPr>
+              <a:t>  •  Time order — position is measured before the GPA it predicts.</a:t>
+            </a:r>
+          </a:p>
+          <a:p>
+            <a:pPr>
+              <a:lnSpc>
+                <a:spcPct val="120000"/>
+              </a:lnSpc>
+              <a:spcAft>
+                <a:spcPts val="800"/>
+              </a:spcAft>
+            </a:pPr>
+            <a:r>
+              <a:rPr sz="1450">
+                <a:solidFill>
+                  <a:srgbClr val="19180F"/>
+                </a:solidFill>
+                <a:latin typeface="Calibri"/>
+              </a:rPr>
+              <a:t>  •  Past GPA controlled — we compare students at the same current grade.</a:t>
+            </a:r>
+          </a:p>
+          <a:p>
+            <a:pPr>
+              <a:lnSpc>
+                <a:spcPct val="120000"/>
+              </a:lnSpc>
+              <a:spcAft>
+                <a:spcPts val="800"/>
+              </a:spcAft>
+            </a:pPr>
+            <a:r>
+              <a:rPr sz="1450">
+                <a:solidFill>
+                  <a:srgbClr val="19180F"/>
+                </a:solidFill>
+                <a:latin typeface="Calibri"/>
+              </a:rPr>
+              <a:t>  •  Reverse arrow measured directly — does a GPA rise bring new friends? (Smirnov &amp; Thurner's tie-formation check)</a:t>
+            </a:r>
+          </a:p>
+        </p:txBody>
+      </p:sp>
+      <p:sp>
+        <p:nvSpPr>
+          <p:cNvPr id="8" name="Rounded Rectangle 7"/>
+          <p:cNvSpPr/>
+          <p:nvPr/>
+        </p:nvSpPr>
+        <p:spPr>
+          <a:xfrm>
+            <a:off x="640080" y="5943600"/>
+            <a:ext cx="10927080" cy="566928"/>
+          </a:xfrm>
+          <a:prstGeom prst="roundRect">
+            <a:avLst>
+              <a:gd name="adj" fmla="val 12000"/>
+            </a:avLst>
+          </a:prstGeom>
+          <a:solidFill>
+            <a:srgbClr val="E9F0FA"/>
+          </a:solidFill>
+          <a:ln w="15875">
+            <a:solidFill>
+              <a:srgbClr val="2A78D6"/>
+            </a:solidFill>
+          </a:ln>
+          <a:effectLst/>
+        </p:spPr>
+        <p:style>
+          <a:lnRef idx="1">
+            <a:schemeClr val="accent1"/>
+          </a:lnRef>
+          <a:fillRef idx="3">
+            <a:schemeClr val="accent1"/>
+          </a:fillRef>
+          <a:effectRef idx="2">
+            <a:schemeClr val="accent1"/>
+          </a:effectRef>
+          <a:fontRef idx="minor">
+            <a:schemeClr val="lt1"/>
+          </a:fontRef>
+        </p:style>
+        <p:txBody>
+          <a:bodyPr rtlCol="0" anchor="ctr" wrap="square" lIns="109728" rIns="109728"/>
+          <a:lstStyle/>
+          <a:p>
+            <a:pPr algn="ctr"/>
+            <a:r>
+              <a:rPr sz="1450" b="1">
+                <a:solidFill>
+                  <a:srgbClr val="19180F"/>
+                </a:solidFill>
+                <a:latin typeface="Calibri"/>
+              </a:rPr>
+              <a:t>So our claim is that position predicts later grades — not that it causes them.</a:t>
+            </a:r>
+          </a:p>
+        </p:txBody>
+      </p:sp>
+      <p:sp>
+        <p:nvSpPr>
+          <p:cNvPr id="9" name="TextBox 8"/>
+          <p:cNvSpPr txBox="1"/>
+          <p:nvPr/>
+        </p:nvSpPr>
+        <p:spPr>
+          <a:xfrm>
+            <a:off x="11430000" y="6473952"/>
+            <a:ext cx="640080" cy="320040"/>
+          </a:xfrm>
+          <a:prstGeom prst="rect">
+            <a:avLst/>
+          </a:prstGeom>
+          <a:noFill/>
+        </p:spPr>
+        <p:txBody>
+          <a:bodyPr wrap="square" anchor="t">
+            <a:spAutoFit/>
+          </a:bodyPr>
+          <a:lstStyle/>
+          <a:p>
+            <a:pPr algn="r">
+              <a:lnSpc>
+                <a:spcPct val="115000"/>
+              </a:lnSpc>
+            </a:pPr>
+            <a:r>
+              <a:rPr sz="1100" b="0" i="0">
+                <a:solidFill>
+                  <a:srgbClr val="55503F"/>
+                </a:solidFill>
+                <a:latin typeface="Calibri"/>
+              </a:rPr>
+              <a:t>10</a:t>
+            </a:r>
+          </a:p>
+        </p:txBody>
+      </p:sp>
+    </p:spTree>
+  </p:cSld>
+  <p:clrMapOvr>
+    <a:masterClrMapping/>
+  </p:clrMapOvr>
+</p:sld>
+</file>
+
+<file path=ppt/slides/slide11.xml><?xml version="1.0" encoding="utf-8"?>
+<p:sld xmlns:a="http://schemas.openxmlformats.org/drawingml/2006/main" xmlns:p="http://schemas.openxmlformats.org/presentationml/2006/main" xmlns:r="http://schemas.openxmlformats.org/officeDocument/2006/relationships">
+  <p:cSld>
+    <p:spTree>
+      <p:nvGrpSpPr>
+        <p:cNvPr id="1" name=""/>
+        <p:cNvGrpSpPr/>
+        <p:nvPr/>
+      </p:nvGrpSpPr>
+      <p:grpSpPr/>
+      <p:sp>
+        <p:nvSpPr>
+          <p:cNvPr id="2" name="Rectangle 1"/>
+          <p:cNvSpPr/>
+          <p:nvPr/>
+        </p:nvSpPr>
+        <p:spPr>
+          <a:xfrm>
+            <a:off x="0" y="0"/>
+            <a:ext cx="12191695" cy="6858000"/>
+          </a:xfrm>
+          <a:prstGeom prst="rect">
+            <a:avLst/>
+          </a:prstGeom>
+          <a:solidFill>
+            <a:srgbClr val="FAF9F6"/>
+          </a:solidFill>
+          <a:ln>
+            <a:noFill/>
+          </a:ln>
+          <a:effectLst/>
+        </p:spPr>
+        <p:style>
+          <a:lnRef idx="1">
+            <a:schemeClr val="accent1"/>
+          </a:lnRef>
+          <a:fillRef idx="3">
+            <a:schemeClr val="accent1"/>
+          </a:fillRef>
+          <a:effectRef idx="2">
+            <a:schemeClr val="accent1"/>
+          </a:effectRef>
+          <a:fontRef idx="minor">
+            <a:schemeClr val="lt1"/>
+          </a:fontRef>
+        </p:style>
+        <p:txBody>
+          <a:bodyPr rtlCol="0" anchor="ctr"/>
+          <a:lstStyle/>
+          <a:p>
+            <a:pPr algn="ctr"/>
+          </a:p>
+        </p:txBody>
+      </p:sp>
+      <p:sp>
+        <p:nvSpPr>
+          <p:cNvPr id="3" name="TextBox 2"/>
+          <p:cNvSpPr txBox="1"/>
+          <p:nvPr/>
+        </p:nvSpPr>
+        <p:spPr>
+          <a:xfrm>
+            <a:off x="640080" y="365760"/>
+            <a:ext cx="10058400" cy="365760"/>
+          </a:xfrm>
+          <a:prstGeom prst="rect">
+            <a:avLst/>
+          </a:prstGeom>
+          <a:noFill/>
+        </p:spPr>
+        <p:txBody>
+          <a:bodyPr wrap="square" anchor="t">
+            <a:spAutoFit/>
+          </a:bodyPr>
+          <a:lstStyle/>
+          <a:p>
+            <a:pPr algn="l">
+              <a:lnSpc>
+                <a:spcPct val="115000"/>
+              </a:lnSpc>
+            </a:pPr>
+            <a:r>
+              <a:rPr sz="1300" b="1" i="0">
+                <a:solidFill>
+                  <a:srgbClr val="EB6834"/>
+                </a:solidFill>
+                <a:latin typeface="Calibri"/>
+              </a:rPr>
+              <a:t>OUR PLAN</a:t>
+            </a:r>
+          </a:p>
+        </p:txBody>
+      </p:sp>
+      <p:sp>
+        <p:nvSpPr>
+          <p:cNvPr id="4" name="TextBox 3"/>
+          <p:cNvSpPr txBox="1"/>
+          <p:nvPr/>
+        </p:nvSpPr>
+        <p:spPr>
+          <a:xfrm>
+            <a:off x="640080" y="713232"/>
+            <a:ext cx="10972800" cy="914400"/>
+          </a:xfrm>
+          <a:prstGeom prst="rect">
+            <a:avLst/>
+          </a:prstGeom>
+          <a:noFill/>
+        </p:spPr>
+        <p:txBody>
+          <a:bodyPr wrap="square" anchor="t">
+            <a:spAutoFit/>
+          </a:bodyPr>
+          <a:lstStyle/>
+          <a:p>
+            <a:pPr algn="l">
+              <a:lnSpc>
+                <a:spcPct val="108000"/>
+              </a:lnSpc>
+            </a:pPr>
+            <a:r>
+              <a:rPr sz="2700" b="1" i="0">
+                <a:solidFill>
+                  <a:srgbClr val="19180F"/>
+                </a:solidFill>
+                <a:latin typeface="Georgia"/>
+              </a:rPr>
+              <a:t>Three layers of analysis</a:t>
+            </a:r>
+          </a:p>
+        </p:txBody>
+      </p:sp>
+      <p:sp>
+        <p:nvSpPr>
+          <p:cNvPr id="5" name="Rounded Rectangle 4"/>
+          <p:cNvSpPr/>
+          <p:nvPr/>
+        </p:nvSpPr>
+        <p:spPr>
+          <a:xfrm>
+            <a:off x="640080" y="1920240"/>
+            <a:ext cx="3319272" cy="1234440"/>
+          </a:xfrm>
+          <a:prstGeom prst="roundRect">
+            <a:avLst>
+              <a:gd name="adj" fmla="val 12000"/>
+            </a:avLst>
+          </a:prstGeom>
+          <a:solidFill>
+            <a:srgbClr val="FFFFFF"/>
+          </a:solidFill>
+          <a:ln w="15875">
+            <a:solidFill>
+              <a:srgbClr val="DDD8CD"/>
+            </a:solidFill>
+          </a:ln>
+          <a:effectLst/>
+        </p:spPr>
+        <p:style>
+          <a:lnRef idx="1">
+            <a:schemeClr val="accent1"/>
+          </a:lnRef>
+          <a:fillRef idx="3">
+            <a:schemeClr val="accent1"/>
+          </a:fillRef>
+          <a:effectRef idx="2">
+            <a:schemeClr val="accent1"/>
+          </a:effectRef>
+          <a:fontRef idx="minor">
+            <a:schemeClr val="lt1"/>
+          </a:fontRef>
+        </p:style>
+        <p:txBody>
+          <a:bodyPr rtlCol="0" anchor="ctr" wrap="square" lIns="109728" rIns="109728"/>
+          <a:lstStyle/>
+          <a:p>
+            <a:pPr algn="ctr"/>
+            <a:r>
+              <a:rPr sz="1400" b="0">
+                <a:solidFill>
+                  <a:srgbClr val="19180F"/>
+                </a:solidFill>
+                <a:latin typeface="Calibri"/>
+              </a:rPr>
+              <a:t/>
+            </a:r>
+          </a:p>
+        </p:txBody>
+      </p:sp>
+      <p:sp>
+        <p:nvSpPr>
+          <p:cNvPr id="6" name="TextBox 5"/>
+          <p:cNvSpPr txBox="1"/>
+          <p:nvPr/>
+        </p:nvSpPr>
+        <p:spPr>
+          <a:xfrm>
+            <a:off x="868680" y="2066544"/>
+            <a:ext cx="2862072" cy="274320"/>
+          </a:xfrm>
+          <a:prstGeom prst="rect">
+            <a:avLst/>
+          </a:prstGeom>
+          <a:noFill/>
+        </p:spPr>
+        <p:txBody>
+          <a:bodyPr wrap="square" anchor="t">
+            <a:spAutoFit/>
+          </a:bodyPr>
+          <a:lstStyle/>
+          <a:p>
+            <a:pPr algn="l">
+              <a:lnSpc>
+                <a:spcPct val="115000"/>
+              </a:lnSpc>
+            </a:pPr>
+            <a:r>
+              <a:rPr sz="1250" b="1" i="0">
+                <a:solidFill>
+                  <a:srgbClr val="EB6834"/>
+                </a:solidFill>
+                <a:latin typeface="Calibri"/>
+              </a:rPr>
+              <a:t>LAYER 1</a:t>
+            </a:r>
+          </a:p>
+        </p:txBody>
+      </p:sp>
+      <p:sp>
+        <p:nvSpPr>
+          <p:cNvPr id="7" name="TextBox 6"/>
+          <p:cNvSpPr txBox="1"/>
+          <p:nvPr/>
+        </p:nvSpPr>
+        <p:spPr>
+          <a:xfrm>
+            <a:off x="868680" y="2377440"/>
+            <a:ext cx="2862072" cy="457200"/>
+          </a:xfrm>
+          <a:prstGeom prst="rect">
+            <a:avLst/>
+          </a:prstGeom>
+          <a:noFill/>
+        </p:spPr>
+        <p:txBody>
+          <a:bodyPr wrap="square" anchor="t">
+            <a:spAutoFit/>
+          </a:bodyPr>
+          <a:lstStyle/>
+          <a:p>
+            <a:pPr algn="l">
+              <a:lnSpc>
+                <a:spcPct val="115000"/>
+              </a:lnSpc>
+            </a:pPr>
+            <a:r>
+              <a:rPr sz="1900" b="1" i="0">
+                <a:solidFill>
+                  <a:srgbClr val="19180F"/>
+                </a:solidFill>
+                <a:latin typeface="Georgia"/>
+              </a:rPr>
+              <a:t>Replicate</a:t>
+            </a:r>
+          </a:p>
+        </p:txBody>
+      </p:sp>
+      <p:sp>
+        <p:nvSpPr>
+          <p:cNvPr id="8" name="Rounded Rectangle 7"/>
+          <p:cNvSpPr/>
+          <p:nvPr/>
+        </p:nvSpPr>
+        <p:spPr>
+          <a:xfrm>
+            <a:off x="4416552" y="1920240"/>
+            <a:ext cx="3319272" cy="1234440"/>
+          </a:xfrm>
+          <a:prstGeom prst="roundRect">
+            <a:avLst>
+              <a:gd name="adj" fmla="val 12000"/>
+            </a:avLst>
+          </a:prstGeom>
+          <a:solidFill>
+            <a:srgbClr val="FFFFFF"/>
+          </a:solidFill>
+          <a:ln w="15875">
+            <a:solidFill>
+              <a:srgbClr val="DDD8CD"/>
+            </a:solidFill>
+          </a:ln>
+          <a:effectLst/>
+        </p:spPr>
+        <p:style>
+          <a:lnRef idx="1">
+            <a:schemeClr val="accent1"/>
+          </a:lnRef>
+          <a:fillRef idx="3">
+            <a:schemeClr val="accent1"/>
+          </a:fillRef>
+          <a:effectRef idx="2">
+            <a:schemeClr val="accent1"/>
+          </a:effectRef>
+          <a:fontRef idx="minor">
+            <a:schemeClr val="lt1"/>
+          </a:fontRef>
+        </p:style>
+        <p:txBody>
+          <a:bodyPr rtlCol="0" anchor="ctr" wrap="square" lIns="109728" rIns="109728"/>
+          <a:lstStyle/>
+          <a:p>
+            <a:pPr algn="ctr"/>
+            <a:r>
+              <a:rPr sz="1400" b="0">
+                <a:solidFill>
+                  <a:srgbClr val="19180F"/>
+                </a:solidFill>
+                <a:latin typeface="Calibri"/>
+              </a:rPr>
+              <a:t/>
+            </a:r>
+          </a:p>
+        </p:txBody>
+      </p:sp>
+      <p:sp>
+        <p:nvSpPr>
+          <p:cNvPr id="9" name="TextBox 8"/>
+          <p:cNvSpPr txBox="1"/>
+          <p:nvPr/>
+        </p:nvSpPr>
+        <p:spPr>
+          <a:xfrm>
+            <a:off x="4645152" y="2066544"/>
+            <a:ext cx="2862072" cy="274320"/>
+          </a:xfrm>
+          <a:prstGeom prst="rect">
+            <a:avLst/>
+          </a:prstGeom>
+          <a:noFill/>
+        </p:spPr>
+        <p:txBody>
+          <a:bodyPr wrap="square" anchor="t">
+            <a:spAutoFit/>
+          </a:bodyPr>
+          <a:lstStyle/>
+          <a:p>
+            <a:pPr algn="l">
+              <a:lnSpc>
+                <a:spcPct val="115000"/>
+              </a:lnSpc>
+            </a:pPr>
+            <a:r>
+              <a:rPr sz="1250" b="1" i="0">
+                <a:solidFill>
+                  <a:srgbClr val="EB6834"/>
+                </a:solidFill>
+                <a:latin typeface="Calibri"/>
+              </a:rPr>
+              <a:t>LAYER 2</a:t>
+            </a:r>
+          </a:p>
+        </p:txBody>
+      </p:sp>
+      <p:sp>
+        <p:nvSpPr>
+          <p:cNvPr id="10" name="TextBox 9"/>
+          <p:cNvSpPr txBox="1"/>
+          <p:nvPr/>
+        </p:nvSpPr>
+        <p:spPr>
+          <a:xfrm>
+            <a:off x="4645152" y="2377440"/>
+            <a:ext cx="2862072" cy="457200"/>
+          </a:xfrm>
+          <a:prstGeom prst="rect">
+            <a:avLst/>
+          </a:prstGeom>
+          <a:noFill/>
+        </p:spPr>
+        <p:txBody>
+          <a:bodyPr wrap="square" anchor="t">
+            <a:spAutoFit/>
+          </a:bodyPr>
+          <a:lstStyle/>
+          <a:p>
+            <a:pPr algn="l">
+              <a:lnSpc>
+                <a:spcPct val="115000"/>
+              </a:lnSpc>
+            </a:pPr>
+            <a:r>
+              <a:rPr sz="1900" b="1" i="0">
+                <a:solidFill>
+                  <a:srgbClr val="19180F"/>
+                </a:solidFill>
+                <a:latin typeface="Georgia"/>
+              </a:rPr>
+              <a:t>Test the model</a:t>
+            </a:r>
+          </a:p>
+        </p:txBody>
+      </p:sp>
+      <p:sp>
+        <p:nvSpPr>
+          <p:cNvPr id="11" name="Rounded Rectangle 10"/>
+          <p:cNvSpPr/>
+          <p:nvPr/>
+        </p:nvSpPr>
+        <p:spPr>
+          <a:xfrm>
+            <a:off x="8193024" y="1920240"/>
+            <a:ext cx="3319272" cy="1234440"/>
+          </a:xfrm>
+          <a:prstGeom prst="roundRect">
+            <a:avLst>
+              <a:gd name="adj" fmla="val 12000"/>
+            </a:avLst>
+          </a:prstGeom>
+          <a:solidFill>
+            <a:srgbClr val="FFFFFF"/>
+          </a:solidFill>
+          <a:ln w="15875">
+            <a:solidFill>
+              <a:srgbClr val="DDD8CD"/>
+            </a:solidFill>
+          </a:ln>
+          <a:effectLst/>
+        </p:spPr>
+        <p:style>
+          <a:lnRef idx="1">
+            <a:schemeClr val="accent1"/>
+          </a:lnRef>
+          <a:fillRef idx="3">
+            <a:schemeClr val="accent1"/>
+          </a:fillRef>
+          <a:effectRef idx="2">
+            <a:schemeClr val="accent1"/>
+          </a:effectRef>
+          <a:fontRef idx="minor">
+            <a:schemeClr val="lt1"/>
+          </a:fontRef>
+        </p:style>
+        <p:txBody>
+          <a:bodyPr rtlCol="0" anchor="ctr" wrap="square" lIns="109728" rIns="109728"/>
+          <a:lstStyle/>
+          <a:p>
+            <a:pPr algn="ctr"/>
+            <a:r>
+              <a:rPr sz="1400" b="0">
+                <a:solidFill>
+                  <a:srgbClr val="19180F"/>
+                </a:solidFill>
+                <a:latin typeface="Calibri"/>
+              </a:rPr>
+              <a:t/>
+            </a:r>
+          </a:p>
+        </p:txBody>
+      </p:sp>
+      <p:sp>
+        <p:nvSpPr>
+          <p:cNvPr id="12" name="TextBox 11"/>
+          <p:cNvSpPr txBox="1"/>
+          <p:nvPr/>
+        </p:nvSpPr>
+        <p:spPr>
+          <a:xfrm>
+            <a:off x="8421624" y="2066544"/>
+            <a:ext cx="2862072" cy="274320"/>
+          </a:xfrm>
+          <a:prstGeom prst="rect">
+            <a:avLst/>
+          </a:prstGeom>
+          <a:noFill/>
+        </p:spPr>
+        <p:txBody>
+          <a:bodyPr wrap="square" anchor="t">
+            <a:spAutoFit/>
+          </a:bodyPr>
+          <a:lstStyle/>
+          <a:p>
+            <a:pPr algn="l">
+              <a:lnSpc>
+                <a:spcPct val="115000"/>
+              </a:lnSpc>
+            </a:pPr>
+            <a:r>
+              <a:rPr sz="1250" b="1" i="0">
+                <a:solidFill>
+                  <a:srgbClr val="EB6834"/>
+                </a:solidFill>
+                <a:latin typeface="Calibri"/>
+              </a:rPr>
+              <a:t>LAYER 3</a:t>
+            </a:r>
+          </a:p>
+        </p:txBody>
+      </p:sp>
+      <p:sp>
+        <p:nvSpPr>
+          <p:cNvPr id="13" name="TextBox 12"/>
+          <p:cNvSpPr txBox="1"/>
+          <p:nvPr/>
+        </p:nvSpPr>
+        <p:spPr>
+          <a:xfrm>
+            <a:off x="8421624" y="2377440"/>
+            <a:ext cx="2862072" cy="457200"/>
+          </a:xfrm>
+          <a:prstGeom prst="rect">
+            <a:avLst/>
+          </a:prstGeom>
+          <a:noFill/>
+        </p:spPr>
+        <p:txBody>
+          <a:bodyPr wrap="square" anchor="t">
+            <a:spAutoFit/>
+          </a:bodyPr>
+          <a:lstStyle/>
+          <a:p>
+            <a:pPr algn="l">
+              <a:lnSpc>
+                <a:spcPct val="115000"/>
+              </a:lnSpc>
+            </a:pPr>
+            <a:r>
+              <a:rPr sz="1900" b="1" i="0">
+                <a:solidFill>
+                  <a:srgbClr val="19180F"/>
+                </a:solidFill>
+                <a:latin typeface="Georgia"/>
+              </a:rPr>
+              <a:t>Compare</a:t>
+            </a:r>
+          </a:p>
+        </p:txBody>
+      </p:sp>
+      <p:cxnSp>
+        <p:nvCxnSpPr>
+          <p:cNvPr id="14" name="Connector 13"/>
+          <p:cNvCxnSpPr/>
+          <p:nvPr/>
+        </p:nvCxnSpPr>
+        <p:spPr>
+          <a:xfrm>
+            <a:off x="3959352" y="2537460"/>
+            <a:ext cx="457200" cy="0"/>
+          </a:xfrm>
+          <a:prstGeom prst="line">
+            <a:avLst/>
+          </a:prstGeom>
+          <a:ln w="25400">
+            <a:solidFill>
+              <a:srgbClr val="55503F"/>
+            </a:solidFill>
+            <a:tailEnd type="triangle" w="med" len="med"/>
+          </a:ln>
+        </p:spPr>
+        <p:style>
+          <a:lnRef idx="2">
+            <a:schemeClr val="accent1"/>
+          </a:lnRef>
+          <a:fillRef idx="0">
+            <a:schemeClr val="accent1"/>
+          </a:fillRef>
+          <a:effectRef idx="1">
+            <a:schemeClr val="accent1"/>
+          </a:effectRef>
+          <a:fontRef idx="minor">
+            <a:schemeClr val="tx1"/>
+          </a:fontRef>
+        </p:style>
+      </p:cxnSp>
+      <p:cxnSp>
+        <p:nvCxnSpPr>
+          <p:cNvPr id="15" name="Connector 14"/>
+          <p:cNvCxnSpPr/>
+          <p:nvPr/>
+        </p:nvCxnSpPr>
+        <p:spPr>
+          <a:xfrm>
+            <a:off x="7735824" y="2537460"/>
+            <a:ext cx="457200" cy="0"/>
+          </a:xfrm>
+          <a:prstGeom prst="line">
+            <a:avLst/>
+          </a:prstGeom>
+          <a:ln w="25400">
+            <a:solidFill>
+              <a:srgbClr val="55503F"/>
+            </a:solidFill>
+            <a:tailEnd type="triangle" w="med" len="med"/>
+          </a:ln>
+        </p:spPr>
+        <p:style>
+          <a:lnRef idx="2">
+            <a:schemeClr val="accent1"/>
+          </a:lnRef>
+          <a:fillRef idx="0">
+            <a:schemeClr val="accent1"/>
+          </a:fillRef>
+          <a:effectRef idx="1">
+            <a:schemeClr val="accent1"/>
+          </a:effectRef>
+          <a:fontRef idx="minor">
+            <a:schemeClr val="tx1"/>
+          </a:fontRef>
+        </p:style>
+      </p:cxnSp>
+      <p:sp>
+        <p:nvSpPr>
+          <p:cNvPr id="16" name="TextBox 15"/>
+          <p:cNvSpPr txBox="1"/>
+          <p:nvPr/>
+        </p:nvSpPr>
+        <p:spPr>
+          <a:xfrm>
+            <a:off x="685800" y="3429000"/>
+            <a:ext cx="3319272" cy="1463040"/>
+          </a:xfrm>
+          <a:prstGeom prst="rect">
+            <a:avLst/>
+          </a:prstGeom>
+          <a:noFill/>
+        </p:spPr>
+        <p:txBody>
+          <a:bodyPr wrap="square" anchor="t">
+            <a:spAutoFit/>
+          </a:bodyPr>
+          <a:lstStyle/>
+          <a:p>
+            <a:pPr algn="l">
+              <a:lnSpc>
+                <a:spcPct val="130000"/>
+              </a:lnSpc>
+            </a:pPr>
+            <a:r>
+              <a:rPr sz="1350" b="0" i="0">
+                <a:solidFill>
+                  <a:srgbClr val="55503F"/>
+                </a:solidFill>
+                <a:latin typeface="Calibri"/>
+              </a:rPr>
+              <a:t>Rebuild Smirnov &amp; Thurner's</a:t>
+            </a:r>
+          </a:p>
+          <a:p>
+            <a:pPr algn="l">
+              <a:lnSpc>
+                <a:spcPct val="130000"/>
+              </a:lnSpc>
+            </a:pPr>
+            <a:r>
+              <a:rPr sz="1350" b="0" i="0">
+                <a:solidFill>
+                  <a:srgbClr val="55503F"/>
+                </a:solidFill>
+                <a:latin typeface="Calibri"/>
+              </a:rPr>
+              <a:t>selection-vs-influence checks</a:t>
+            </a:r>
+          </a:p>
+          <a:p>
+            <a:pPr algn="l">
+              <a:lnSpc>
+                <a:spcPct val="130000"/>
+              </a:lnSpc>
+            </a:pPr>
+            <a:r>
+              <a:rPr sz="1350" b="0" i="0">
+                <a:solidFill>
+                  <a:srgbClr val="55503F"/>
+                </a:solidFill>
+                <a:latin typeface="Calibri"/>
+              </a:rPr>
+              <a:t>on the same data</a:t>
+            </a:r>
+          </a:p>
+        </p:txBody>
+      </p:sp>
+      <p:sp>
+        <p:nvSpPr>
+          <p:cNvPr id="17" name="TextBox 16"/>
+          <p:cNvSpPr txBox="1"/>
+          <p:nvPr/>
+        </p:nvSpPr>
+        <p:spPr>
+          <a:xfrm>
+            <a:off x="4462272" y="3429000"/>
+            <a:ext cx="3319272" cy="1463040"/>
+          </a:xfrm>
+          <a:prstGeom prst="rect">
+            <a:avLst/>
+          </a:prstGeom>
+          <a:noFill/>
+        </p:spPr>
+        <p:txBody>
+          <a:bodyPr wrap="square" anchor="t">
+            <a:spAutoFit/>
+          </a:bodyPr>
+          <a:lstStyle/>
+          <a:p>
+            <a:pPr algn="l">
+              <a:lnSpc>
+                <a:spcPct val="130000"/>
+              </a:lnSpc>
+            </a:pPr>
+            <a:r>
+              <a:rPr sz="1350" b="0" i="0">
+                <a:solidFill>
+                  <a:srgbClr val="55503F"/>
+                </a:solidFill>
+                <a:latin typeface="Calibri"/>
+              </a:rPr>
+              <a:t>Compute Katz-Bonacich</a:t>
+            </a:r>
+          </a:p>
+          <a:p>
+            <a:pPr algn="l">
+              <a:lnSpc>
+                <a:spcPct val="130000"/>
+              </a:lnSpc>
+            </a:pPr>
+            <a:r>
+              <a:rPr sz="1350" b="0" i="0">
+                <a:solidFill>
+                  <a:srgbClr val="55503F"/>
+                </a:solidFill>
+                <a:latin typeface="Calibri"/>
+              </a:rPr>
+              <a:t>centrality; test the prediction</a:t>
+            </a:r>
+          </a:p>
+          <a:p>
+            <a:pPr algn="l">
+              <a:lnSpc>
+                <a:spcPct val="130000"/>
+              </a:lnSpc>
+            </a:pPr>
+            <a:r>
+              <a:rPr sz="1350" b="0" i="0">
+                <a:solidFill>
+                  <a:srgbClr val="55503F"/>
+                </a:solidFill>
+                <a:latin typeface="Calibri"/>
+              </a:rPr>
+              <a:t>across the φ dial</a:t>
+            </a:r>
+          </a:p>
+        </p:txBody>
+      </p:sp>
+      <p:sp>
+        <p:nvSpPr>
+          <p:cNvPr id="18" name="TextBox 17"/>
+          <p:cNvSpPr txBox="1"/>
+          <p:nvPr/>
+        </p:nvSpPr>
+        <p:spPr>
+          <a:xfrm>
+            <a:off x="8238744" y="3429000"/>
+            <a:ext cx="3319272" cy="1463040"/>
+          </a:xfrm>
+          <a:prstGeom prst="rect">
+            <a:avLst/>
+          </a:prstGeom>
+          <a:noFill/>
+        </p:spPr>
+        <p:txBody>
+          <a:bodyPr wrap="square" anchor="t">
+            <a:spAutoFit/>
+          </a:bodyPr>
+          <a:lstStyle/>
+          <a:p>
+            <a:pPr algn="l">
+              <a:lnSpc>
+                <a:spcPct val="130000"/>
+              </a:lnSpc>
+            </a:pPr>
+            <a:r>
+              <a:rPr sz="1350" b="0" i="0">
+                <a:solidFill>
+                  <a:srgbClr val="55503F"/>
+                </a:solidFill>
+                <a:latin typeface="Calibri"/>
+              </a:rPr>
+              <a:t>High school vs. university —</a:t>
+            </a:r>
+          </a:p>
+          <a:p>
+            <a:pPr algn="l">
+              <a:lnSpc>
+                <a:spcPct val="130000"/>
+              </a:lnSpc>
+            </a:pPr>
+            <a:r>
+              <a:rPr sz="1350" b="0" i="0">
+                <a:solidFill>
+                  <a:srgbClr val="55503F"/>
+                </a:solidFill>
+                <a:latin typeface="Calibri"/>
+              </a:rPr>
+              <a:t>does the effect hold across</a:t>
+            </a:r>
+          </a:p>
+          <a:p>
+            <a:pPr algn="l">
+              <a:lnSpc>
+                <a:spcPct val="130000"/>
+              </a:lnSpc>
+            </a:pPr>
+            <a:r>
+              <a:rPr sz="1350" b="0" i="0">
+                <a:solidFill>
+                  <a:srgbClr val="55503F"/>
+                </a:solidFill>
+                <a:latin typeface="Calibri"/>
+              </a:rPr>
+              <a:t>settings?</a:t>
+            </a:r>
+          </a:p>
+        </p:txBody>
+      </p:sp>
+      <p:sp>
+        <p:nvSpPr>
+          <p:cNvPr id="19" name="TextBox 18"/>
+          <p:cNvSpPr txBox="1"/>
+          <p:nvPr/>
+        </p:nvSpPr>
+        <p:spPr>
+          <a:xfrm>
+            <a:off x="640080" y="5212080"/>
+            <a:ext cx="10881360" cy="731520"/>
+          </a:xfrm>
+          <a:prstGeom prst="rect">
+            <a:avLst/>
+          </a:prstGeom>
+          <a:noFill/>
+        </p:spPr>
+        <p:txBody>
+          <a:bodyPr wrap="square" anchor="t">
+            <a:spAutoFit/>
+          </a:bodyPr>
+          <a:lstStyle/>
+          <a:p>
+            <a:pPr algn="l">
+              <a:lnSpc>
+                <a:spcPct val="125000"/>
+              </a:lnSpc>
+            </a:pPr>
+            <a:r>
+              <a:rPr sz="1450" b="0" i="1">
+                <a:solidFill>
+                  <a:srgbClr val="55503F"/>
+                </a:solidFill>
+                <a:latin typeface="Calibri"/>
+              </a:rPr>
+              <a:t>One headline test, at φ = 0.85 × (1/λmax), is fixed in advance — so later robustness checks can't be accused of cherry-picking.</a:t>
+            </a:r>
+          </a:p>
+        </p:txBody>
+      </p:sp>
+      <p:sp>
+        <p:nvSpPr>
+          <p:cNvPr id="20" name="Rounded Rectangle 19"/>
+          <p:cNvSpPr/>
+          <p:nvPr/>
+        </p:nvSpPr>
+        <p:spPr>
+          <a:xfrm>
+            <a:off x="640080" y="5989320"/>
+            <a:ext cx="10927080" cy="548640"/>
+          </a:xfrm>
+          <a:prstGeom prst="roundRect">
+            <a:avLst>
+              <a:gd name="adj" fmla="val 12000"/>
+            </a:avLst>
+          </a:prstGeom>
+          <a:solidFill>
+            <a:srgbClr val="F1EFE8"/>
+          </a:solidFill>
+          <a:ln w="15875">
+            <a:solidFill>
+              <a:srgbClr val="DDD8CD"/>
+            </a:solidFill>
+          </a:ln>
+          <a:effectLst/>
+        </p:spPr>
+        <p:style>
+          <a:lnRef idx="1">
+            <a:schemeClr val="accent1"/>
+          </a:lnRef>
+          <a:fillRef idx="3">
+            <a:schemeClr val="accent1"/>
+          </a:fillRef>
+          <a:effectRef idx="2">
+            <a:schemeClr val="accent1"/>
+          </a:effectRef>
+          <a:fontRef idx="minor">
+            <a:schemeClr val="lt1"/>
+          </a:fontRef>
+        </p:style>
+        <p:txBody>
+          <a:bodyPr rtlCol="0" anchor="ctr" wrap="square" lIns="109728" rIns="109728"/>
+          <a:lstStyle/>
+          <a:p>
+            <a:pPr algn="ctr"/>
+            <a:r>
+              <a:rPr sz="1250" b="0">
+                <a:solidFill>
+                  <a:srgbClr val="19180F"/>
+                </a:solidFill>
+                <a:latin typeface="Calibri"/>
+              </a:rPr>
+              <a:t>Also grounded in: Calvó-Armengol, Patacchini &amp; Zenou (2009)  ·  Giulietti, Vlassopoulos &amp; Zenou (2020) on peer depression</a:t>
+            </a:r>
+          </a:p>
+        </p:txBody>
+      </p:sp>
+      <p:sp>
+        <p:nvSpPr>
+          <p:cNvPr id="21" name="TextBox 20"/>
+          <p:cNvSpPr txBox="1"/>
+          <p:nvPr/>
+        </p:nvSpPr>
+        <p:spPr>
+          <a:xfrm>
+            <a:off x="11430000" y="6473952"/>
+            <a:ext cx="640080" cy="320040"/>
+          </a:xfrm>
+          <a:prstGeom prst="rect">
+            <a:avLst/>
+          </a:prstGeom>
+          <a:noFill/>
+        </p:spPr>
+        <p:txBody>
+          <a:bodyPr wrap="square" anchor="t">
+            <a:spAutoFit/>
+          </a:bodyPr>
+          <a:lstStyle/>
+          <a:p>
+            <a:pPr algn="r">
+              <a:lnSpc>
+                <a:spcPct val="115000"/>
+              </a:lnSpc>
+            </a:pPr>
+            <a:r>
+              <a:rPr sz="1100" b="0" i="0">
+                <a:solidFill>
+                  <a:srgbClr val="55503F"/>
+                </a:solidFill>
+                <a:latin typeface="Calibri"/>
+              </a:rPr>
+              <a:t>11</a:t>
+            </a:r>
+          </a:p>
+        </p:txBody>
+      </p:sp>
+    </p:spTree>
+  </p:cSld>
+  <p:clrMapOvr>
+    <a:masterClrMapping/>
+  </p:clrMapOvr>
+</p:sld>
+</file>
+
+<file path=ppt/slides/slide12.xml><?xml version="1.0" encoding="utf-8"?>
+<p:sld xmlns:a="http://schemas.openxmlformats.org/drawingml/2006/main" xmlns:p="http://schemas.openxmlformats.org/presentationml/2006/main" xmlns:r="http://schemas.openxmlformats.org/officeDocument/2006/relationships">
+  <p:cSld>
+    <p:spTree>
+      <p:nvGrpSpPr>
+        <p:cNvPr id="1" name=""/>
+        <p:cNvGrpSpPr/>
+        <p:nvPr/>
+      </p:nvGrpSpPr>
+      <p:grpSpPr/>
+      <p:sp>
+        <p:nvSpPr>
+          <p:cNvPr id="2" name="Rectangle 1"/>
+          <p:cNvSpPr/>
+          <p:nvPr/>
+        </p:nvSpPr>
+        <p:spPr>
+          <a:xfrm>
+            <a:off x="0" y="0"/>
+            <a:ext cx="12191695" cy="6858000"/>
+          </a:xfrm>
+          <a:prstGeom prst="rect">
+            <a:avLst/>
+          </a:prstGeom>
+          <a:solidFill>
+            <a:srgbClr val="FAF9F6"/>
+          </a:solidFill>
+          <a:ln>
+            <a:noFill/>
+          </a:ln>
+          <a:effectLst/>
+        </p:spPr>
+        <p:style>
+          <a:lnRef idx="1">
+            <a:schemeClr val="accent1"/>
+          </a:lnRef>
+          <a:fillRef idx="3">
+            <a:schemeClr val="accent1"/>
+          </a:fillRef>
+          <a:effectRef idx="2">
+            <a:schemeClr val="accent1"/>
+          </a:effectRef>
+          <a:fontRef idx="minor">
+            <a:schemeClr val="lt1"/>
+          </a:fontRef>
+        </p:style>
+        <p:txBody>
+          <a:bodyPr rtlCol="0" anchor="ctr"/>
+          <a:lstStyle/>
+          <a:p>
+            <a:pPr algn="ctr"/>
+          </a:p>
+        </p:txBody>
+      </p:sp>
+      <p:sp>
+        <p:nvSpPr>
+          <p:cNvPr id="3" name="TextBox 2"/>
+          <p:cNvSpPr txBox="1"/>
+          <p:nvPr/>
+        </p:nvSpPr>
+        <p:spPr>
+          <a:xfrm>
+            <a:off x="822960" y="2468880"/>
+            <a:ext cx="10058400" cy="1097280"/>
+          </a:xfrm>
+          <a:prstGeom prst="rect">
+            <a:avLst/>
+          </a:prstGeom>
+          <a:noFill/>
+        </p:spPr>
+        <p:txBody>
+          <a:bodyPr wrap="square" anchor="t">
+            <a:spAutoFit/>
+          </a:bodyPr>
+          <a:lstStyle/>
+          <a:p>
+            <a:pPr algn="l">
+              <a:lnSpc>
+                <a:spcPct val="115000"/>
+              </a:lnSpc>
+            </a:pPr>
+            <a:r>
+              <a:rPr sz="4600" b="1" i="0">
+                <a:solidFill>
+                  <a:srgbClr val="19180F"/>
+                </a:solidFill>
+                <a:latin typeface="Georgia"/>
+              </a:rPr>
+              <a:t>Questions?</a:t>
+            </a:r>
+          </a:p>
+        </p:txBody>
+      </p:sp>
+      <p:sp>
+        <p:nvSpPr>
+          <p:cNvPr id="4" name="TextBox 3"/>
+          <p:cNvSpPr txBox="1"/>
+          <p:nvPr/>
+        </p:nvSpPr>
+        <p:spPr>
+          <a:xfrm>
+            <a:off x="868680" y="3794760"/>
+            <a:ext cx="10515600" cy="1828800"/>
+          </a:xfrm>
+          <a:prstGeom prst="rect">
+            <a:avLst/>
+          </a:prstGeom>
+          <a:noFill/>
+        </p:spPr>
+        <p:txBody>
+          <a:bodyPr wrap="square">
+            <a:spAutoFit/>
+          </a:bodyPr>
+          <a:lstStyle/>
+          <a:p>
+            <a:pPr>
+              <a:lnSpc>
+                <a:spcPct val="120000"/>
+              </a:lnSpc>
+              <a:spcAft>
+                <a:spcPts val="800"/>
+              </a:spcAft>
+            </a:pPr>
+            <a:r>
+              <a:rPr sz="1400">
+                <a:solidFill>
+                  <a:srgbClr val="55503F"/>
+                </a:solidFill>
+                <a:latin typeface="Calibri"/>
+              </a:rPr>
+              <a:t>  •  Data — Smirnov &amp; Thurner (2017), Harvard Dataverse  doi:10.7910/DVN/SZA9YW</a:t>
+            </a:r>
+          </a:p>
+          <a:p>
+            <a:pPr>
+              <a:lnSpc>
+                <a:spcPct val="120000"/>
+              </a:lnSpc>
+              <a:spcAft>
+                <a:spcPts val="800"/>
+              </a:spcAft>
+            </a:pPr>
+            <a:r>
+              <a:rPr sz="1400">
+                <a:solidFill>
+                  <a:srgbClr val="55503F"/>
+                </a:solidFill>
+                <a:latin typeface="Calibri"/>
+              </a:rPr>
+              <a:t>  •  Model — Ballester, Calvó-Armengol &amp; Zenou (2006); Calvó-Armengol, Patacchini &amp; Zenou (2009)</a:t>
+            </a:r>
+          </a:p>
+          <a:p>
+            <a:pPr>
+              <a:lnSpc>
+                <a:spcPct val="120000"/>
+              </a:lnSpc>
+              <a:spcAft>
+                <a:spcPts val="800"/>
+              </a:spcAft>
+            </a:pPr>
+            <a:r>
+              <a:rPr sz="1400">
+                <a:solidFill>
+                  <a:srgbClr val="55503F"/>
+                </a:solidFill>
+                <a:latin typeface="Calibri"/>
+              </a:rPr>
+              <a:t>  •  Full detail — research_brief.pdf</a:t>
+            </a:r>
+          </a:p>
+        </p:txBody>
+      </p:sp>
+      <p:sp>
+        <p:nvSpPr>
+          <p:cNvPr id="5" name="TextBox 4"/>
+          <p:cNvSpPr txBox="1"/>
+          <p:nvPr/>
+        </p:nvSpPr>
+        <p:spPr>
+          <a:xfrm>
+            <a:off x="11430000" y="6473952"/>
+            <a:ext cx="640080" cy="320040"/>
+          </a:xfrm>
+          <a:prstGeom prst="rect">
+            <a:avLst/>
+          </a:prstGeom>
+          <a:noFill/>
+        </p:spPr>
+        <p:txBody>
+          <a:bodyPr wrap="square" anchor="t">
+            <a:spAutoFit/>
+          </a:bodyPr>
+          <a:lstStyle/>
+          <a:p>
+            <a:pPr algn="r">
+              <a:lnSpc>
+                <a:spcPct val="115000"/>
+              </a:lnSpc>
+            </a:pPr>
+            <a:r>
+              <a:rPr sz="1100" b="0" i="0">
+                <a:solidFill>
+                  <a:srgbClr val="55503F"/>
+                </a:solidFill>
+                <a:latin typeface="Calibri"/>
+              </a:rPr>
+              <a:t>12</a:t>
             </a:r>
           </a:p>
         </p:txBody>
@@ -3446,7 +5029,7 @@
         <p:spPr>
           <a:xfrm>
             <a:off x="640080" y="365760"/>
-            <a:ext cx="8229600" cy="365760"/>
+            <a:ext cx="10058400" cy="365760"/>
           </a:xfrm>
           <a:prstGeom prst="rect">
             <a:avLst/>
@@ -3471,7 +5054,7 @@
                 </a:solidFill>
                 <a:latin typeface="Calibri"/>
               </a:rPr>
-              <a:t>WHY THIS QUESTION  ·  PRIOR WORK</a:t>
+              <a:t>THE PUZZLE</a:t>
             </a:r>
           </a:p>
         </p:txBody>
@@ -3484,8 +5067,8 @@
         </p:nvSpPr>
         <p:spPr>
           <a:xfrm>
-            <a:off x="640080" y="685800"/>
-            <a:ext cx="10881360" cy="914400"/>
+            <a:off x="640080" y="713232"/>
+            <a:ext cx="10972800" cy="914400"/>
           </a:xfrm>
           <a:prstGeom prst="rect">
             <a:avLst/>
@@ -3500,60 +5083,45 @@
           <a:p>
             <a:pPr algn="l">
               <a:lnSpc>
-                <a:spcPct val="115000"/>
-              </a:lnSpc>
-            </a:pPr>
-            <a:r>
-              <a:rPr sz="2800" b="1" i="0">
+                <a:spcPct val="108000"/>
+              </a:lnSpc>
+            </a:pPr>
+            <a:r>
+              <a:rPr sz="2700" b="1" i="0">
                 <a:solidFill>
                   <a:srgbClr val="19180F"/>
                 </a:solidFill>
                 <a:latin typeface="Georgia"/>
               </a:rPr>
-              <a:t>The gap in Smirnov &amp; Thurner (2017)</a:t>
-            </a:r>
-          </a:p>
-        </p:txBody>
-      </p:sp>
-      <p:sp>
-        <p:nvSpPr>
-          <p:cNvPr id="5" name="TextBox 4"/>
-          <p:cNvSpPr txBox="1"/>
-          <p:nvPr/>
-        </p:nvSpPr>
-        <p:spPr>
-          <a:xfrm>
-            <a:off x="640080" y="1554480"/>
-            <a:ext cx="10881360" cy="548640"/>
-          </a:xfrm>
-          <a:prstGeom prst="rect">
-            <a:avLst/>
-          </a:prstGeom>
-          <a:noFill/>
-        </p:spPr>
-        <p:txBody>
-          <a:bodyPr wrap="square" anchor="t">
-            <a:spAutoFit/>
-          </a:bodyPr>
-          <a:lstStyle/>
-          <a:p>
-            <a:pPr algn="l">
-              <a:lnSpc>
-                <a:spcPct val="115000"/>
-              </a:lnSpc>
-            </a:pPr>
-            <a:r>
-              <a:rPr sz="1600" b="0" i="1">
-                <a:solidFill>
-                  <a:srgbClr val="55503F"/>
-                </a:solidFill>
-                <a:latin typeface="Calibri"/>
-              </a:rPr>
-              <a:t>Grades depend on more than effort — but how the social world around a student matters is still debated.</a:t>
-            </a:r>
-          </a:p>
-        </p:txBody>
-      </p:sp>
+              <a:t>Two students. Same-looking friend groups. Same grades?</a:t>
+            </a:r>
+          </a:p>
+        </p:txBody>
+      </p:sp>
+      <p:pic>
+        <p:nvPicPr>
+          <p:cNvPr id="5" name="Picture 4" descr="student_comparison.png"/>
+          <p:cNvPicPr>
+            <a:picLocks noChangeAspect="1"/>
+          </p:cNvPicPr>
+          <p:nvPr/>
+        </p:nvPicPr>
+        <p:blipFill>
+          <a:blip r:embed="rId2"/>
+          <a:stretch>
+            <a:fillRect/>
+          </a:stretch>
+        </p:blipFill>
+        <p:spPr>
+          <a:xfrm>
+            <a:off x="1798167" y="1600200"/>
+            <a:ext cx="8595360" cy="4017739"/>
+          </a:xfrm>
+          <a:prstGeom prst="rect">
+            <a:avLst/>
+          </a:prstGeom>
+        </p:spPr>
+      </p:pic>
       <p:sp>
         <p:nvSpPr>
           <p:cNvPr id="6" name="Rounded Rectangle 5"/>
@@ -3562,8 +5130,8 @@
         </p:nvSpPr>
         <p:spPr>
           <a:xfrm>
-            <a:off x="822960" y="2331720"/>
-            <a:ext cx="2834640" cy="914400"/>
+            <a:off x="640080" y="5669280"/>
+            <a:ext cx="10881360" cy="868680"/>
           </a:xfrm>
           <a:prstGeom prst="roundRect">
             <a:avLst>
@@ -3571,11 +5139,11 @@
             </a:avLst>
           </a:prstGeom>
           <a:solidFill>
-            <a:srgbClr val="FFFFFF"/>
+            <a:srgbClr val="E9F0FA"/>
           </a:solidFill>
           <a:ln w="15875">
             <a:solidFill>
-              <a:srgbClr val="DDD8CD"/>
+              <a:srgbClr val="2A78D6"/>
             </a:solidFill>
           </a:ln>
           <a:effectLst/>
@@ -3600,325 +5168,20 @@
           <a:p>
             <a:pPr algn="ctr"/>
             <a:r>
-              <a:rPr sz="1500" b="1">
+              <a:rPr sz="2100" b="1">
                 <a:solidFill>
                   <a:srgbClr val="19180F"/>
                 </a:solidFill>
-                <a:latin typeface="Calibri"/>
-              </a:rPr>
-              <a:t>Friend selection</a:t>
-            </a:r>
-          </a:p>
-        </p:txBody>
-      </p:sp>
-      <p:sp>
-        <p:nvSpPr>
-          <p:cNvPr id="7" name="Rounded Rectangle 6"/>
-          <p:cNvSpPr/>
-          <p:nvPr/>
-        </p:nvSpPr>
-        <p:spPr>
-          <a:xfrm>
-            <a:off x="4160520" y="2331720"/>
-            <a:ext cx="2834640" cy="914400"/>
-          </a:xfrm>
-          <a:prstGeom prst="roundRect">
-            <a:avLst>
-              <a:gd name="adj" fmla="val 12000"/>
-            </a:avLst>
-          </a:prstGeom>
-          <a:solidFill>
-            <a:srgbClr val="FFFFFF"/>
-          </a:solidFill>
-          <a:ln w="15875">
-            <a:solidFill>
-              <a:srgbClr val="DDD8CD"/>
-            </a:solidFill>
-          </a:ln>
-          <a:effectLst/>
-        </p:spPr>
-        <p:style>
-          <a:lnRef idx="1">
-            <a:schemeClr val="accent1"/>
-          </a:lnRef>
-          <a:fillRef idx="3">
-            <a:schemeClr val="accent1"/>
-          </a:fillRef>
-          <a:effectRef idx="2">
-            <a:schemeClr val="accent1"/>
-          </a:effectRef>
-          <a:fontRef idx="minor">
-            <a:schemeClr val="lt1"/>
-          </a:fontRef>
-        </p:style>
-        <p:txBody>
-          <a:bodyPr rtlCol="0" anchor="ctr" wrap="square" lIns="109728" rIns="109728"/>
-          <a:lstStyle/>
-          <a:p>
-            <a:pPr algn="ctr"/>
-            <a:r>
-              <a:rPr sz="1500" b="1">
-                <a:solidFill>
-                  <a:srgbClr val="19180F"/>
-                </a:solidFill>
-                <a:latin typeface="Calibri"/>
-              </a:rPr>
-              <a:t>Friend-group GPA
-similarity</a:t>
-            </a:r>
-          </a:p>
-        </p:txBody>
-      </p:sp>
-      <p:sp>
-        <p:nvSpPr>
-          <p:cNvPr id="8" name="Rounded Rectangle 7"/>
-          <p:cNvSpPr/>
-          <p:nvPr/>
-        </p:nvSpPr>
-        <p:spPr>
-          <a:xfrm>
-            <a:off x="7498080" y="2331720"/>
-            <a:ext cx="2834640" cy="914400"/>
-          </a:xfrm>
-          <a:prstGeom prst="roundRect">
-            <a:avLst>
-              <a:gd name="adj" fmla="val 12000"/>
-            </a:avLst>
-          </a:prstGeom>
-          <a:solidFill>
-            <a:srgbClr val="FFFFFF"/>
-          </a:solidFill>
-          <a:ln w="15875">
-            <a:solidFill>
-              <a:srgbClr val="DDD8CD"/>
-            </a:solidFill>
-          </a:ln>
-          <a:effectLst/>
-        </p:spPr>
-        <p:style>
-          <a:lnRef idx="1">
-            <a:schemeClr val="accent1"/>
-          </a:lnRef>
-          <a:fillRef idx="3">
-            <a:schemeClr val="accent1"/>
-          </a:fillRef>
-          <a:effectRef idx="2">
-            <a:schemeClr val="accent1"/>
-          </a:effectRef>
-          <a:fontRef idx="minor">
-            <a:schemeClr val="lt1"/>
-          </a:fontRef>
-        </p:style>
-        <p:txBody>
-          <a:bodyPr rtlCol="0" anchor="ctr" wrap="square" lIns="109728" rIns="109728"/>
-          <a:lstStyle/>
-          <a:p>
-            <a:pPr algn="ctr"/>
-            <a:r>
-              <a:rPr sz="1500" b="1">
-                <a:solidFill>
-                  <a:srgbClr val="19180F"/>
-                </a:solidFill>
-                <a:latin typeface="Calibri"/>
-              </a:rPr>
-              <a:t>Observed homophily
-in GPA</a:t>
-            </a:r>
-          </a:p>
-        </p:txBody>
-      </p:sp>
-      <p:cxnSp>
-        <p:nvCxnSpPr>
-          <p:cNvPr id="9" name="Connector 8"/>
-          <p:cNvCxnSpPr/>
-          <p:nvPr/>
-        </p:nvCxnSpPr>
-        <p:spPr>
-          <a:xfrm>
-            <a:off x="3657600" y="2788920.0"/>
-            <a:ext cx="502920" cy="0.0"/>
-          </a:xfrm>
-          <a:prstGeom prst="line">
-            <a:avLst/>
-          </a:prstGeom>
-          <a:ln w="25400">
-            <a:solidFill>
-              <a:srgbClr val="55503F"/>
-            </a:solidFill>
-            <a:tailEnd type="triangle" w="med" len="med"/>
-          </a:ln>
-        </p:spPr>
-        <p:style>
-          <a:lnRef idx="2">
-            <a:schemeClr val="accent1"/>
-          </a:lnRef>
-          <a:fillRef idx="0">
-            <a:schemeClr val="accent1"/>
-          </a:fillRef>
-          <a:effectRef idx="1">
-            <a:schemeClr val="accent1"/>
-          </a:effectRef>
-          <a:fontRef idx="minor">
-            <a:schemeClr val="tx1"/>
-          </a:fontRef>
-        </p:style>
-      </p:cxnSp>
-      <p:cxnSp>
-        <p:nvCxnSpPr>
-          <p:cNvPr id="10" name="Connector 9"/>
-          <p:cNvCxnSpPr/>
-          <p:nvPr/>
-        </p:nvCxnSpPr>
-        <p:spPr>
-          <a:xfrm>
-            <a:off x="6995160" y="2788920.0"/>
-            <a:ext cx="502920" cy="0.0"/>
-          </a:xfrm>
-          <a:prstGeom prst="line">
-            <a:avLst/>
-          </a:prstGeom>
-          <a:ln w="25400">
-            <a:solidFill>
-              <a:srgbClr val="55503F"/>
-            </a:solidFill>
-            <a:tailEnd type="triangle" w="med" len="med"/>
-          </a:ln>
-        </p:spPr>
-        <p:style>
-          <a:lnRef idx="2">
-            <a:schemeClr val="accent1"/>
-          </a:lnRef>
-          <a:fillRef idx="0">
-            <a:schemeClr val="accent1"/>
-          </a:fillRef>
-          <a:effectRef idx="1">
-            <a:schemeClr val="accent1"/>
-          </a:effectRef>
-          <a:fontRef idx="minor">
-            <a:schemeClr val="tx1"/>
-          </a:fontRef>
-        </p:style>
-      </p:cxnSp>
-      <p:sp>
-        <p:nvSpPr>
-          <p:cNvPr id="11" name="TextBox 10"/>
-          <p:cNvSpPr txBox="1"/>
-          <p:nvPr/>
-        </p:nvSpPr>
-        <p:spPr>
-          <a:xfrm>
-            <a:off x="822960" y="3520440"/>
-            <a:ext cx="10332720" cy="457200"/>
-          </a:xfrm>
-          <a:prstGeom prst="rect">
-            <a:avLst/>
-          </a:prstGeom>
-          <a:noFill/>
-        </p:spPr>
-        <p:txBody>
-          <a:bodyPr wrap="square" anchor="t">
-            <a:spAutoFit/>
-          </a:bodyPr>
-          <a:lstStyle/>
-          <a:p>
-            <a:pPr algn="l">
-              <a:lnSpc>
-                <a:spcPct val="115000"/>
-              </a:lnSpc>
-            </a:pPr>
-            <a:r>
-              <a:rPr sz="1600" b="0" i="0">
-                <a:solidFill>
-                  <a:srgbClr val="55503F"/>
-                </a:solidFill>
-                <a:latin typeface="Calibri"/>
-              </a:rPr>
-              <a:t>A real, changing “who-likes-who” network of Russian students, matched to GPA.</a:t>
-            </a:r>
-          </a:p>
-        </p:txBody>
-      </p:sp>
-      <p:sp>
-        <p:nvSpPr>
-          <p:cNvPr id="12" name="TextBox 11"/>
-          <p:cNvSpPr txBox="1"/>
-          <p:nvPr/>
-        </p:nvSpPr>
-        <p:spPr>
-          <a:xfrm>
-            <a:off x="822960" y="4206240"/>
-            <a:ext cx="10332720" cy="1280160"/>
-          </a:xfrm>
-          <a:prstGeom prst="rect">
-            <a:avLst/>
-          </a:prstGeom>
-          <a:noFill/>
-        </p:spPr>
-        <p:txBody>
-          <a:bodyPr wrap="square" anchor="t">
-            <a:spAutoFit/>
-          </a:bodyPr>
-          <a:lstStyle/>
-          <a:p>
-            <a:pPr algn="l">
-              <a:lnSpc>
-                <a:spcPct val="135000"/>
-              </a:lnSpc>
-            </a:pPr>
-            <a:r>
-              <a:rPr sz="1600" b="0" i="0">
-                <a:solidFill>
-                  <a:srgbClr val="55503F"/>
-                </a:solidFill>
-                <a:latin typeface="Calibri"/>
-              </a:rPr>
-              <a:t>Their method asks one question: who is this student connected to, and what is the average GPA of those specific people? It never asks where a student sits inside the wider network.</a:t>
-            </a:r>
-          </a:p>
-        </p:txBody>
-      </p:sp>
-      <p:sp>
-        <p:nvSpPr>
-          <p:cNvPr id="13" name="TextBox 12"/>
-          <p:cNvSpPr txBox="1"/>
-          <p:nvPr/>
-        </p:nvSpPr>
-        <p:spPr>
-          <a:xfrm>
-            <a:off x="822960" y="5623560"/>
-            <a:ext cx="10332720" cy="731520"/>
-          </a:xfrm>
-          <a:prstGeom prst="rect">
-            <a:avLst/>
-          </a:prstGeom>
-          <a:noFill/>
-        </p:spPr>
-        <p:txBody>
-          <a:bodyPr wrap="square" anchor="t">
-            <a:spAutoFit/>
-          </a:bodyPr>
-          <a:lstStyle/>
-          <a:p>
-            <a:pPr algn="l">
-              <a:lnSpc>
-                <a:spcPct val="115000"/>
-              </a:lnSpc>
-            </a:pPr>
-            <a:r>
-              <a:rPr sz="1700" b="1" i="0">
-                <a:solidFill>
-                  <a:srgbClr val="EB6834"/>
-                </a:solidFill>
-                <a:latin typeface="Calibri"/>
-              </a:rPr>
-              <a:t>→ Two students with identical friends get an identical score, no matter how different those friends' own social worlds are.</a:t>
-            </a:r>
-          </a:p>
-        </p:txBody>
-      </p:sp>
-      <p:sp>
-        <p:nvSpPr>
-          <p:cNvPr id="14" name="TextBox 13"/>
+                <a:latin typeface="Georgia"/>
+              </a:rPr>
+              <a:t>Does a student's position in a friendship network affect their grades?</a:t>
+            </a:r>
+          </a:p>
+        </p:txBody>
+      </p:sp>
+      <p:sp>
+        <p:nvSpPr>
+          <p:cNvPr id="7" name="TextBox 6"/>
           <p:cNvSpPr txBox="1"/>
           <p:nvPr/>
         </p:nvSpPr>
@@ -4026,7 +5289,7 @@
         <p:spPr>
           <a:xfrm>
             <a:off x="640080" y="365760"/>
-            <a:ext cx="8229600" cy="365760"/>
+            <a:ext cx="10058400" cy="365760"/>
           </a:xfrm>
           <a:prstGeom prst="rect">
             <a:avLst/>
@@ -4051,7 +5314,7 @@
                 </a:solidFill>
                 <a:latin typeface="Calibri"/>
               </a:rPr>
-              <a:t>THE PUZZLE → OUR QUESTION</a:t>
+              <a:t>WHAT WE ALREADY KNOW  ·  PRIOR WORK</a:t>
             </a:r>
           </a:p>
         </p:txBody>
@@ -4064,8 +5327,8 @@
         </p:nvSpPr>
         <p:spPr>
           <a:xfrm>
-            <a:off x="640080" y="685800"/>
-            <a:ext cx="10881360" cy="914400"/>
+            <a:off x="640080" y="713232"/>
+            <a:ext cx="10972800" cy="914400"/>
           </a:xfrm>
           <a:prstGeom prst="rect">
             <a:avLst/>
@@ -4080,55 +5343,31 @@
           <a:p>
             <a:pPr algn="l">
               <a:lnSpc>
-                <a:spcPct val="115000"/>
-              </a:lnSpc>
-            </a:pPr>
-            <a:r>
-              <a:rPr sz="2800" b="1" i="0">
+                <a:spcPct val="108000"/>
+              </a:lnSpc>
+            </a:pPr>
+            <a:r>
+              <a:rPr sz="2700" b="1" i="0">
                 <a:solidFill>
                   <a:srgbClr val="19180F"/>
                 </a:solidFill>
                 <a:latin typeface="Georgia"/>
               </a:rPr>
-              <a:t>Same friends, same average friend GPA — same outcome?</a:t>
-            </a:r>
-          </a:p>
-        </p:txBody>
-      </p:sp>
-      <p:pic>
-        <p:nvPicPr>
-          <p:cNvPr id="5" name="Picture 4" descr="student_comparison.png"/>
-          <p:cNvPicPr>
-            <a:picLocks noChangeAspect="1"/>
-          </p:cNvPicPr>
-          <p:nvPr/>
-        </p:nvPicPr>
-        <p:blipFill>
-          <a:blip r:embed="rId2"/>
-          <a:stretch>
-            <a:fillRect/>
-          </a:stretch>
-        </p:blipFill>
-        <p:spPr>
-          <a:xfrm>
-            <a:off x="2194560" y="1554480"/>
-            <a:ext cx="7772400" cy="3633062"/>
-          </a:xfrm>
-          <a:prstGeom prst="rect">
-            <a:avLst/>
-          </a:prstGeom>
-        </p:spPr>
-      </p:pic>
-      <p:sp>
-        <p:nvSpPr>
-          <p:cNvPr id="6" name="TextBox 5"/>
+              <a:t>Smirnov &amp; Thurner (2017): the effect is mostly selection</a:t>
+            </a:r>
+          </a:p>
+        </p:txBody>
+      </p:sp>
+      <p:sp>
+        <p:nvSpPr>
+          <p:cNvPr id="5" name="TextBox 4"/>
           <p:cNvSpPr txBox="1"/>
           <p:nvPr/>
         </p:nvSpPr>
         <p:spPr>
           <a:xfrm>
-            <a:off x="822960" y="5074920"/>
-            <a:ext cx="10515600" cy="1463040"/>
+            <a:off x="640080" y="1554480"/>
+            <a:ext cx="10972800" cy="457200"/>
           </a:xfrm>
           <a:prstGeom prst="rect">
             <a:avLst/>
@@ -4141,26 +5380,422 @@
           </a:bodyPr>
           <a:lstStyle/>
           <a:p>
-            <a:pPr algn="ctr">
-              <a:lnSpc>
-                <a:spcPct val="110000"/>
-              </a:lnSpc>
-            </a:pPr>
-            <a:r>
-              <a:rPr sz="3200" b="1" i="0">
+            <a:pPr algn="l">
+              <a:lnSpc>
+                <a:spcPct val="115000"/>
+              </a:lnSpc>
+            </a:pPr>
+            <a:r>
+              <a:rPr sz="1500" b="0" i="1">
+                <a:solidFill>
+                  <a:srgbClr val="55503F"/>
+                </a:solidFill>
+                <a:latin typeface="Calibri"/>
+              </a:rPr>
+              <a:t>A real, changing “who-likes-who” network of Russian students, matched to GPA.</a:t>
+            </a:r>
+          </a:p>
+        </p:txBody>
+      </p:sp>
+      <p:sp>
+        <p:nvSpPr>
+          <p:cNvPr id="6" name="Rounded Rectangle 5"/>
+          <p:cNvSpPr/>
+          <p:nvPr/>
+        </p:nvSpPr>
+        <p:spPr>
+          <a:xfrm>
+            <a:off x="777240" y="2286000"/>
+            <a:ext cx="3246120" cy="960120"/>
+          </a:xfrm>
+          <a:prstGeom prst="roundRect">
+            <a:avLst>
+              <a:gd name="adj" fmla="val 12000"/>
+            </a:avLst>
+          </a:prstGeom>
+          <a:solidFill>
+            <a:srgbClr val="FFFFFF"/>
+          </a:solidFill>
+          <a:ln w="15875">
+            <a:solidFill>
+              <a:srgbClr val="DDD8CD"/>
+            </a:solidFill>
+          </a:ln>
+          <a:effectLst/>
+        </p:spPr>
+        <p:style>
+          <a:lnRef idx="1">
+            <a:schemeClr val="accent1"/>
+          </a:lnRef>
+          <a:fillRef idx="3">
+            <a:schemeClr val="accent1"/>
+          </a:fillRef>
+          <a:effectRef idx="2">
+            <a:schemeClr val="accent1"/>
+          </a:effectRef>
+          <a:fontRef idx="minor">
+            <a:schemeClr val="lt1"/>
+          </a:fontRef>
+        </p:style>
+        <p:txBody>
+          <a:bodyPr rtlCol="0" anchor="ctr" wrap="square" lIns="109728" rIns="109728"/>
+          <a:lstStyle/>
+          <a:p>
+            <a:pPr algn="ctr"/>
+            <a:r>
+              <a:rPr sz="1400" b="1">
                 <a:solidFill>
                   <a:srgbClr val="19180F"/>
                 </a:solidFill>
-                <a:latin typeface="Georgia"/>
-              </a:rPr>
-              <a:t>Does your position in a friendship network affect your grades?</a:t>
-            </a:r>
-          </a:p>
-        </p:txBody>
-      </p:sp>
-      <p:sp>
-        <p:nvSpPr>
-          <p:cNvPr id="7" name="TextBox 6"/>
+                <a:latin typeface="Calibri"/>
+              </a:rPr>
+              <a:t>Students pick friends</a:t>
+            </a:r>
+          </a:p>
+          <a:p>
+            <a:pPr algn="ctr"/>
+            <a:r>
+              <a:rPr sz="1400" b="1">
+                <a:solidFill>
+                  <a:srgbClr val="19180F"/>
+                </a:solidFill>
+                <a:latin typeface="Calibri"/>
+              </a:rPr>
+              <a:t>with similar GPA</a:t>
+            </a:r>
+          </a:p>
+        </p:txBody>
+      </p:sp>
+      <p:sp>
+        <p:nvSpPr>
+          <p:cNvPr id="7" name="Rounded Rectangle 6"/>
+          <p:cNvSpPr/>
+          <p:nvPr/>
+        </p:nvSpPr>
+        <p:spPr>
+          <a:xfrm>
+            <a:off x="4480560" y="2286000"/>
+            <a:ext cx="3246120" cy="960120"/>
+          </a:xfrm>
+          <a:prstGeom prst="roundRect">
+            <a:avLst>
+              <a:gd name="adj" fmla="val 12000"/>
+            </a:avLst>
+          </a:prstGeom>
+          <a:solidFill>
+            <a:srgbClr val="FFFFFF"/>
+          </a:solidFill>
+          <a:ln w="15875">
+            <a:solidFill>
+              <a:srgbClr val="DDD8CD"/>
+            </a:solidFill>
+          </a:ln>
+          <a:effectLst/>
+        </p:spPr>
+        <p:style>
+          <a:lnRef idx="1">
+            <a:schemeClr val="accent1"/>
+          </a:lnRef>
+          <a:fillRef idx="3">
+            <a:schemeClr val="accent1"/>
+          </a:fillRef>
+          <a:effectRef idx="2">
+            <a:schemeClr val="accent1"/>
+          </a:effectRef>
+          <a:fontRef idx="minor">
+            <a:schemeClr val="lt1"/>
+          </a:fontRef>
+        </p:style>
+        <p:txBody>
+          <a:bodyPr rtlCol="0" anchor="ctr" wrap="square" lIns="109728" rIns="109728"/>
+          <a:lstStyle/>
+          <a:p>
+            <a:pPr algn="ctr"/>
+            <a:r>
+              <a:rPr sz="1400" b="1">
+                <a:solidFill>
+                  <a:srgbClr val="19180F"/>
+                </a:solidFill>
+                <a:latin typeface="Calibri"/>
+              </a:rPr>
+              <a:t>Friend groups end up</a:t>
+            </a:r>
+          </a:p>
+          <a:p>
+            <a:pPr algn="ctr"/>
+            <a:r>
+              <a:rPr sz="1400" b="1">
+                <a:solidFill>
+                  <a:srgbClr val="19180F"/>
+                </a:solidFill>
+                <a:latin typeface="Calibri"/>
+              </a:rPr>
+              <a:t>GPA-similar</a:t>
+            </a:r>
+          </a:p>
+        </p:txBody>
+      </p:sp>
+      <p:sp>
+        <p:nvSpPr>
+          <p:cNvPr id="8" name="Rounded Rectangle 7"/>
+          <p:cNvSpPr/>
+          <p:nvPr/>
+        </p:nvSpPr>
+        <p:spPr>
+          <a:xfrm>
+            <a:off x="8183880" y="2286000"/>
+            <a:ext cx="3246120" cy="960120"/>
+          </a:xfrm>
+          <a:prstGeom prst="roundRect">
+            <a:avLst>
+              <a:gd name="adj" fmla="val 12000"/>
+            </a:avLst>
+          </a:prstGeom>
+          <a:solidFill>
+            <a:srgbClr val="FFFFFF"/>
+          </a:solidFill>
+          <a:ln w="15875">
+            <a:solidFill>
+              <a:srgbClr val="DDD8CD"/>
+            </a:solidFill>
+          </a:ln>
+          <a:effectLst/>
+        </p:spPr>
+        <p:style>
+          <a:lnRef idx="1">
+            <a:schemeClr val="accent1"/>
+          </a:lnRef>
+          <a:fillRef idx="3">
+            <a:schemeClr val="accent1"/>
+          </a:fillRef>
+          <a:effectRef idx="2">
+            <a:schemeClr val="accent1"/>
+          </a:effectRef>
+          <a:fontRef idx="minor">
+            <a:schemeClr val="lt1"/>
+          </a:fontRef>
+        </p:style>
+        <p:txBody>
+          <a:bodyPr rtlCol="0" anchor="ctr" wrap="square" lIns="109728" rIns="109728"/>
+          <a:lstStyle/>
+          <a:p>
+            <a:pPr algn="ctr"/>
+            <a:r>
+              <a:rPr sz="1400" b="1">
+                <a:solidFill>
+                  <a:srgbClr val="19180F"/>
+                </a:solidFill>
+                <a:latin typeface="Calibri"/>
+              </a:rPr>
+              <a:t>GPA homophily</a:t>
+            </a:r>
+          </a:p>
+          <a:p>
+            <a:pPr algn="ctr"/>
+            <a:r>
+              <a:rPr sz="1400" b="1">
+                <a:solidFill>
+                  <a:srgbClr val="19180F"/>
+                </a:solidFill>
+                <a:latin typeface="Calibri"/>
+              </a:rPr>
+              <a:t>(what we observe)</a:t>
+            </a:r>
+          </a:p>
+        </p:txBody>
+      </p:sp>
+      <p:cxnSp>
+        <p:nvCxnSpPr>
+          <p:cNvPr id="9" name="Connector 8"/>
+          <p:cNvCxnSpPr/>
+          <p:nvPr/>
+        </p:nvCxnSpPr>
+        <p:spPr>
+          <a:xfrm>
+            <a:off x="4023360" y="2766060"/>
+            <a:ext cx="457200" cy="0"/>
+          </a:xfrm>
+          <a:prstGeom prst="line">
+            <a:avLst/>
+          </a:prstGeom>
+          <a:ln w="25400">
+            <a:solidFill>
+              <a:srgbClr val="55503F"/>
+            </a:solidFill>
+            <a:tailEnd type="triangle" w="med" len="med"/>
+          </a:ln>
+        </p:spPr>
+        <p:style>
+          <a:lnRef idx="2">
+            <a:schemeClr val="accent1"/>
+          </a:lnRef>
+          <a:fillRef idx="0">
+            <a:schemeClr val="accent1"/>
+          </a:fillRef>
+          <a:effectRef idx="1">
+            <a:schemeClr val="accent1"/>
+          </a:effectRef>
+          <a:fontRef idx="minor">
+            <a:schemeClr val="tx1"/>
+          </a:fontRef>
+        </p:style>
+      </p:cxnSp>
+      <p:cxnSp>
+        <p:nvCxnSpPr>
+          <p:cNvPr id="10" name="Connector 9"/>
+          <p:cNvCxnSpPr/>
+          <p:nvPr/>
+        </p:nvCxnSpPr>
+        <p:spPr>
+          <a:xfrm>
+            <a:off x="7726680" y="2766060"/>
+            <a:ext cx="457200" cy="0"/>
+          </a:xfrm>
+          <a:prstGeom prst="line">
+            <a:avLst/>
+          </a:prstGeom>
+          <a:ln w="25400">
+            <a:solidFill>
+              <a:srgbClr val="55503F"/>
+            </a:solidFill>
+            <a:tailEnd type="triangle" w="med" len="med"/>
+          </a:ln>
+        </p:spPr>
+        <p:style>
+          <a:lnRef idx="2">
+            <a:schemeClr val="accent1"/>
+          </a:lnRef>
+          <a:fillRef idx="0">
+            <a:schemeClr val="accent1"/>
+          </a:fillRef>
+          <a:effectRef idx="1">
+            <a:schemeClr val="accent1"/>
+          </a:effectRef>
+          <a:fontRef idx="minor">
+            <a:schemeClr val="tx1"/>
+          </a:fontRef>
+        </p:style>
+      </p:cxnSp>
+      <p:sp>
+        <p:nvSpPr>
+          <p:cNvPr id="11" name="TextBox 10"/>
+          <p:cNvSpPr txBox="1"/>
+          <p:nvPr/>
+        </p:nvSpPr>
+        <p:spPr>
+          <a:xfrm>
+            <a:off x="777240" y="3611880"/>
+            <a:ext cx="10607040" cy="548640"/>
+          </a:xfrm>
+          <a:prstGeom prst="rect">
+            <a:avLst/>
+          </a:prstGeom>
+          <a:noFill/>
+        </p:spPr>
+        <p:txBody>
+          <a:bodyPr wrap="square" anchor="t">
+            <a:spAutoFit/>
+          </a:bodyPr>
+          <a:lstStyle/>
+          <a:p>
+            <a:pPr algn="l">
+              <a:lnSpc>
+                <a:spcPct val="115000"/>
+              </a:lnSpc>
+            </a:pPr>
+            <a:r>
+              <a:rPr sz="1600" b="0" i="0">
+                <a:solidFill>
+                  <a:srgbClr val="55503F"/>
+                </a:solidFill>
+                <a:latin typeface="Calibri"/>
+              </a:rPr>
+              <a:t>Their measure is one number per student — the average GPA of their direct friends.</a:t>
+            </a:r>
+          </a:p>
+        </p:txBody>
+      </p:sp>
+      <p:sp>
+        <p:nvSpPr>
+          <p:cNvPr id="12" name="TextBox 11"/>
+          <p:cNvSpPr txBox="1"/>
+          <p:nvPr/>
+        </p:nvSpPr>
+        <p:spPr>
+          <a:xfrm>
+            <a:off x="777240" y="4343400"/>
+            <a:ext cx="10607040" cy="640080"/>
+          </a:xfrm>
+          <a:prstGeom prst="rect">
+            <a:avLst/>
+          </a:prstGeom>
+          <a:noFill/>
+        </p:spPr>
+        <p:txBody>
+          <a:bodyPr wrap="square" anchor="t">
+            <a:spAutoFit/>
+          </a:bodyPr>
+          <a:lstStyle/>
+          <a:p>
+            <a:pPr algn="l">
+              <a:lnSpc>
+                <a:spcPct val="115000"/>
+              </a:lnSpc>
+            </a:pPr>
+            <a:r>
+              <a:rPr sz="1900" b="1" i="0">
+                <a:solidFill>
+                  <a:srgbClr val="EB6834"/>
+                </a:solidFill>
+                <a:latin typeface="Calibri"/>
+              </a:rPr>
+              <a:t>→  It never asks where that student sits in the wider network.</a:t>
+            </a:r>
+          </a:p>
+        </p:txBody>
+      </p:sp>
+      <p:sp>
+        <p:nvSpPr>
+          <p:cNvPr id="13" name="TextBox 12"/>
+          <p:cNvSpPr txBox="1"/>
+          <p:nvPr/>
+        </p:nvSpPr>
+        <p:spPr>
+          <a:xfrm>
+            <a:off x="777240" y="5257800"/>
+            <a:ext cx="10607040" cy="914400"/>
+          </a:xfrm>
+          <a:prstGeom prst="rect">
+            <a:avLst/>
+          </a:prstGeom>
+          <a:noFill/>
+        </p:spPr>
+        <p:txBody>
+          <a:bodyPr wrap="square" anchor="t">
+            <a:spAutoFit/>
+          </a:bodyPr>
+          <a:lstStyle/>
+          <a:p>
+            <a:pPr algn="l">
+              <a:lnSpc>
+                <a:spcPct val="130000"/>
+              </a:lnSpc>
+            </a:pPr>
+            <a:r>
+              <a:rPr sz="1500" b="0" i="0">
+                <a:solidFill>
+                  <a:srgbClr val="55503F"/>
+                </a:solidFill>
+                <a:latin typeface="Calibri"/>
+              </a:rPr>
+              <a:t>Two students with the same direct friends score the same — however different those friends' own social worlds are.</a:t>
+            </a:r>
+          </a:p>
+        </p:txBody>
+      </p:sp>
+      <p:sp>
+        <p:nvSpPr>
+          <p:cNvPr id="14" name="TextBox 13"/>
           <p:cNvSpPr txBox="1"/>
           <p:nvPr/>
         </p:nvSpPr>
@@ -4268,7 +5903,7 @@
         <p:spPr>
           <a:xfrm>
             <a:off x="640080" y="365760"/>
-            <a:ext cx="8229600" cy="365760"/>
+            <a:ext cx="10058400" cy="365760"/>
           </a:xfrm>
           <a:prstGeom prst="rect">
             <a:avLst/>
@@ -4306,8 +5941,8 @@
         </p:nvSpPr>
         <p:spPr>
           <a:xfrm>
-            <a:off x="640080" y="685800"/>
-            <a:ext cx="10881360" cy="914400"/>
+            <a:off x="640080" y="713232"/>
+            <a:ext cx="10972800" cy="914400"/>
           </a:xfrm>
           <a:prstGeom prst="rect">
             <a:avLst/>
@@ -4322,17 +5957,17 @@
           <a:p>
             <a:pPr algn="l">
               <a:lnSpc>
-                <a:spcPct val="115000"/>
-              </a:lnSpc>
-            </a:pPr>
-            <a:r>
-              <a:rPr sz="2800" b="1" i="0">
+                <a:spcPct val="108000"/>
+              </a:lnSpc>
+            </a:pPr>
+            <a:r>
+              <a:rPr sz="2700" b="1" i="0">
                 <a:solidFill>
                   <a:srgbClr val="19180F"/>
                 </a:solidFill>
                 <a:latin typeface="Georgia"/>
               </a:rPr>
-              <a:t>Peer effects in effort choice</a:t>
+              <a:t>A model of peer effects in study effort</a:t>
             </a:r>
           </a:p>
         </p:txBody>
@@ -4345,8 +5980,8 @@
         </p:nvSpPr>
         <p:spPr>
           <a:xfrm>
-            <a:off x="640080" y="1691640"/>
-            <a:ext cx="10881360" cy="548640"/>
+            <a:off x="640080" y="1600200"/>
+            <a:ext cx="10972800" cy="457200"/>
           </a:xfrm>
           <a:prstGeom prst="rect">
             <a:avLst/>
@@ -4365,13 +6000,13 @@
               </a:lnSpc>
             </a:pPr>
             <a:r>
-              <a:rPr sz="1300" b="0" i="1">
+              <a:rPr sz="1200" b="0" i="1">
                 <a:solidFill>
                   <a:srgbClr val="55503F"/>
                 </a:solidFill>
                 <a:latin typeface="Calibri"/>
               </a:rPr>
-              <a:t>Calvó-Armengol, Patacchini &amp; Zenou (2009); Ballester, Calvó-Armengol &amp; Zenou (2006)</a:t>
+              <a:t>Ballester, Calvó-Armengol &amp; Zenou (2006)  ·  Calvó-Armengol, Patacchini &amp; Zenou (2009; IZA DP 3859)</a:t>
             </a:r>
           </a:p>
         </p:txBody>
@@ -4384,8 +6019,8 @@
         </p:nvSpPr>
         <p:spPr>
           <a:xfrm>
-            <a:off x="1417320" y="2331720"/>
-            <a:ext cx="9326880" cy="1417320"/>
+            <a:off x="1188720" y="2148840"/>
+            <a:ext cx="9784080" cy="1371600"/>
           </a:xfrm>
           <a:prstGeom prst="roundRect">
             <a:avLst>
@@ -4449,8 +6084,8 @@
         </p:blipFill>
         <p:spPr>
           <a:xfrm>
-            <a:off x="2148840" y="2468880"/>
-            <a:ext cx="7863840" cy="1179308"/>
+            <a:off x="2392527" y="2395728"/>
+            <a:ext cx="7406640" cy="1214673"/>
           </a:xfrm>
           <a:prstGeom prst="rect">
             <a:avLst/>
@@ -4465,7 +6100,7 @@
         </p:nvSpPr>
         <p:spPr>
           <a:xfrm>
-            <a:off x="822960" y="4069080"/>
+            <a:off x="822960" y="3886200"/>
             <a:ext cx="10515600" cy="457200"/>
           </a:xfrm>
           <a:prstGeom prst="rect">
@@ -4491,7 +6126,7 @@
                 </a:solidFill>
                 <a:latin typeface="Calibri"/>
               </a:rPr>
-              <a:t>Each student i chooses effort zᵢ. Two peer channels:</a:t>
+              <a:t>Each student i picks study effort xᵢ. Three parts:</a:t>
             </a:r>
           </a:p>
         </p:txBody>
@@ -4504,8 +6139,8 @@
         </p:nvSpPr>
         <p:spPr>
           <a:xfrm>
-            <a:off x="1005840" y="4572000"/>
-            <a:ext cx="10058400" cy="2103120"/>
+            <a:off x="1005840" y="4389120"/>
+            <a:ext cx="10241280" cy="2194560"/>
           </a:xfrm>
           <a:prstGeom prst="rect">
             <a:avLst/>
@@ -4523,7 +6158,7 @@
                 <a:spcPct val="120000"/>
               </a:lnSpc>
               <a:spcAft>
-                <a:spcPts val="1400"/>
+                <a:spcPts val="1300"/>
               </a:spcAft>
             </a:pPr>
             <a:r>
@@ -4533,7 +6168,7 @@
                 </a:solidFill>
                 <a:latin typeface="Calibri"/>
               </a:rPr>
-              <a:t>  •  Private return to effort is concave — diminishing returns to studying alone (the  −½zᵢ²  term).</a:t>
+              <a:t>  •  a xᵢ  —  what you gain from effort</a:t>
             </a:r>
           </a:p>
           <a:p>
@@ -4542,7 +6177,7 @@
                 <a:spcPct val="120000"/>
               </a:lnSpc>
               <a:spcAft>
-                <a:spcPts val="1400"/>
+                <a:spcPts val="1300"/>
               </a:spcAft>
             </a:pPr>
             <a:r>
@@ -4552,7 +6187,26 @@
                 </a:solidFill>
                 <a:latin typeface="Calibri"/>
               </a:rPr>
-              <a:t>  •  μ scales the baseline value of simply having friends (μgᵢzᵢ); φ scales the strategic complementarity with friends' own effort (gᵢⱼ = 1 if i and j are linked).</a:t>
+              <a:t>  •  −½xᵢ²  —  its rising cost: studying alone has diminishing returns</a:t>
+            </a:r>
+          </a:p>
+          <a:p>
+            <a:pPr>
+              <a:lnSpc>
+                <a:spcPct val="120000"/>
+              </a:lnSpc>
+              <a:spcAft>
+                <a:spcPts val="1300"/>
+              </a:spcAft>
+            </a:pPr>
+            <a:r>
+              <a:rPr sz="1600">
+                <a:solidFill>
+                  <a:srgbClr val="55503F"/>
+                </a:solidFill>
+                <a:latin typeface="Calibri"/>
+              </a:rPr>
+              <a:t>  •  φ Σⱼ gᵢⱼ xᵢ xⱼ  —  the social part: when a friend studies more, your own payoff from studying goes up  (φ &gt; 0)</a:t>
             </a:r>
           </a:p>
         </p:txBody>
@@ -4667,7 +6321,7 @@
         <p:spPr>
           <a:xfrm>
             <a:off x="640080" y="365760"/>
-            <a:ext cx="8229600" cy="365760"/>
+            <a:ext cx="10058400" cy="365760"/>
           </a:xfrm>
           <a:prstGeom prst="rect">
             <a:avLst/>
@@ -4705,8 +6359,8 @@
         </p:nvSpPr>
         <p:spPr>
           <a:xfrm>
-            <a:off x="640080" y="685800"/>
-            <a:ext cx="10881360" cy="914400"/>
+            <a:off x="640080" y="713232"/>
+            <a:ext cx="10972800" cy="914400"/>
           </a:xfrm>
           <a:prstGeom prst="rect">
             <a:avLst/>
@@ -4721,17 +6375,17 @@
           <a:p>
             <a:pPr algn="l">
               <a:lnSpc>
-                <a:spcPct val="115000"/>
-              </a:lnSpc>
-            </a:pPr>
-            <a:r>
-              <a:rPr sz="2800" b="1" i="0">
+                <a:spcPct val="108000"/>
+              </a:lnSpc>
+            </a:pPr>
+            <a:r>
+              <a:rPr sz="2500" b="1" i="0">
                 <a:solidFill>
                   <a:srgbClr val="19180F"/>
                 </a:solidFill>
                 <a:latin typeface="Georgia"/>
               </a:rPr>
-              <a:t>Equilibrium effort = Katz-Bonacich centrality</a:t>
+              <a:t>Everyone best-responds → effort tracks one measure</a:t>
             </a:r>
           </a:p>
         </p:txBody>
@@ -4744,8 +6398,8 @@
         </p:nvSpPr>
         <p:spPr>
           <a:xfrm>
-            <a:off x="822960" y="1645920"/>
-            <a:ext cx="2560320" cy="365760"/>
+            <a:off x="822960" y="1691640"/>
+            <a:ext cx="2286000" cy="365760"/>
           </a:xfrm>
           <a:prstGeom prst="rect">
             <a:avLst/>
@@ -4764,20 +6418,20 @@
               </a:lnSpc>
             </a:pPr>
             <a:r>
-              <a:rPr sz="1500" b="1" i="0">
+              <a:rPr sz="1400" b="1" i="0">
                 <a:solidFill>
                   <a:srgbClr val="55503F"/>
                 </a:solidFill>
                 <a:latin typeface="Calibri"/>
               </a:rPr>
-              <a:t>Best response:</a:t>
+              <a:t>Best response</a:t>
             </a:r>
           </a:p>
         </p:txBody>
       </p:sp>
       <p:pic>
         <p:nvPicPr>
-          <p:cNvPr id="6" name="Picture 5" descr="eq_foc.png"/>
+          <p:cNvPr id="6" name="Picture 5" descr="eq_bestresponse.png"/>
           <p:cNvPicPr>
             <a:picLocks noChangeAspect="1"/>
           </p:cNvPicPr>
@@ -4791,8 +6445,8 @@
         </p:blipFill>
         <p:spPr>
           <a:xfrm>
-            <a:off x="3474720" y="1554480"/>
-            <a:ext cx="4023360" cy="1058061"/>
+            <a:off x="3200400" y="1536192"/>
+            <a:ext cx="3200400" cy="841167"/>
           </a:xfrm>
           <a:prstGeom prst="rect">
             <a:avLst/>
@@ -4807,8 +6461,8 @@
         </p:nvSpPr>
         <p:spPr>
           <a:xfrm>
-            <a:off x="822960" y="2788920"/>
-            <a:ext cx="2560320" cy="365760"/>
+            <a:off x="6858000" y="1691640"/>
+            <a:ext cx="4846320" cy="548640"/>
           </a:xfrm>
           <a:prstGeom prst="rect">
             <a:avLst/>
@@ -4823,24 +6477,63 @@
           <a:p>
             <a:pPr algn="l">
               <a:lnSpc>
+                <a:spcPct val="120000"/>
+              </a:lnSpc>
+            </a:pPr>
+            <a:r>
+              <a:rPr sz="1300" b="0" i="1">
+                <a:solidFill>
+                  <a:srgbClr val="55503F"/>
+                </a:solidFill>
+                <a:latin typeface="Calibri"/>
+              </a:rPr>
+              <a:t>study a baseline, plus more when your friends study more</a:t>
+            </a:r>
+          </a:p>
+        </p:txBody>
+      </p:sp>
+      <p:sp>
+        <p:nvSpPr>
+          <p:cNvPr id="8" name="TextBox 7"/>
+          <p:cNvSpPr txBox="1"/>
+          <p:nvPr/>
+        </p:nvSpPr>
+        <p:spPr>
+          <a:xfrm>
+            <a:off x="822960" y="2697480"/>
+            <a:ext cx="2286000" cy="365760"/>
+          </a:xfrm>
+          <a:prstGeom prst="rect">
+            <a:avLst/>
+          </a:prstGeom>
+          <a:noFill/>
+        </p:spPr>
+        <p:txBody>
+          <a:bodyPr wrap="square" anchor="t">
+            <a:spAutoFit/>
+          </a:bodyPr>
+          <a:lstStyle/>
+          <a:p>
+            <a:pPr algn="l">
+              <a:lnSpc>
                 <a:spcPct val="115000"/>
               </a:lnSpc>
             </a:pPr>
             <a:r>
-              <a:rPr sz="1500" b="1" i="0">
+              <a:rPr sz="1400" b="1" i="0">
                 <a:solidFill>
                   <a:srgbClr val="55503F"/>
                 </a:solidFill>
                 <a:latin typeface="Calibri"/>
               </a:rPr>
-              <a:t>Nash equilibrium:</a:t>
+              <a:t>Solve for all students</a:t>
             </a:r>
           </a:p>
         </p:txBody>
       </p:sp>
       <p:pic>
         <p:nvPicPr>
-          <p:cNvPr id="8" name="Picture 7" descr="eq_equilibrium.png"/>
+          <p:cNvPr id="9" name="Picture 8" descr="eq_equilibrium.png"/>
           <p:cNvPicPr>
             <a:picLocks noChangeAspect="1"/>
           </p:cNvPicPr>
@@ -4854,8 +6547,8 @@
         </p:blipFill>
         <p:spPr>
           <a:xfrm>
-            <a:off x="3474720" y="2606040"/>
-            <a:ext cx="5760720" cy="598864"/>
+            <a:off x="3200400" y="2542032"/>
+            <a:ext cx="5120640" cy="797499"/>
           </a:xfrm>
           <a:prstGeom prst="rect">
             <a:avLst/>
@@ -4864,14 +6557,14 @@
       </p:pic>
       <p:sp>
         <p:nvSpPr>
-          <p:cNvPr id="9" name="TextBox 8"/>
+          <p:cNvPr id="10" name="TextBox 9"/>
           <p:cNvSpPr txBox="1"/>
           <p:nvPr/>
         </p:nvSpPr>
         <p:spPr>
           <a:xfrm>
-            <a:off x="822960" y="3840480"/>
-            <a:ext cx="2560320" cy="365760"/>
+            <a:off x="822960" y="3657600"/>
+            <a:ext cx="2286000" cy="365760"/>
           </a:xfrm>
           <a:prstGeom prst="rect">
             <a:avLst/>
@@ -4890,20 +6583,20 @@
               </a:lnSpc>
             </a:pPr>
             <a:r>
-              <a:rPr sz="1500" b="1" i="0">
+              <a:rPr sz="1400" b="1" i="0">
                 <a:solidFill>
                   <a:srgbClr val="55503F"/>
                 </a:solidFill>
                 <a:latin typeface="Calibri"/>
               </a:rPr>
-              <a:t>Exists only if:</a:t>
+              <a:t>Valid while</a:t>
             </a:r>
           </a:p>
         </p:txBody>
       </p:sp>
       <p:pic>
         <p:nvPicPr>
-          <p:cNvPr id="10" name="Picture 9" descr="eq_condition.png"/>
+          <p:cNvPr id="11" name="Picture 10" descr="eq_condition.png"/>
           <p:cNvPicPr>
             <a:picLocks noChangeAspect="1"/>
           </p:cNvPicPr>
@@ -4917,8 +6610,8 @@
         </p:blipFill>
         <p:spPr>
           <a:xfrm>
-            <a:off x="3474720" y="3657600"/>
-            <a:ext cx="2286000" cy="856811"/>
+            <a:off x="3200400" y="3520440"/>
+            <a:ext cx="1965960" cy="774390"/>
           </a:xfrm>
           <a:prstGeom prst="rect">
             <a:avLst/>
@@ -4927,14 +6620,14 @@
       </p:pic>
       <p:sp>
         <p:nvSpPr>
-          <p:cNvPr id="11" name="Rounded Rectangle 10"/>
+          <p:cNvPr id="12" name="Rounded Rectangle 11"/>
           <p:cNvSpPr/>
           <p:nvPr/>
         </p:nvSpPr>
         <p:spPr>
           <a:xfrm>
-            <a:off x="822960" y="4663440"/>
-            <a:ext cx="10515600" cy="1828800"/>
+            <a:off x="822960" y="4434840"/>
+            <a:ext cx="10515600" cy="1874519"/>
           </a:xfrm>
           <a:prstGeom prst="roundRect">
             <a:avLst>
@@ -4984,14 +6677,14 @@
       </p:sp>
       <p:sp>
         <p:nvSpPr>
-          <p:cNvPr id="12" name="TextBox 11"/>
+          <p:cNvPr id="13" name="TextBox 12"/>
           <p:cNvSpPr txBox="1"/>
           <p:nvPr/>
         </p:nvSpPr>
         <p:spPr>
           <a:xfrm>
-            <a:off x="1143000" y="4846320"/>
-            <a:ext cx="9966960" cy="1508760"/>
+            <a:off x="1143000" y="4617720"/>
+            <a:ext cx="9966960" cy="1554480"/>
           </a:xfrm>
           <a:prstGeom prst="rect">
             <a:avLst/>
@@ -5006,7 +6699,7 @@
           <a:p>
             <a:pPr algn="l">
               <a:lnSpc>
-                <a:spcPct val="130000"/>
+                <a:spcPct val="132000"/>
               </a:lnSpc>
             </a:pPr>
             <a:r>
@@ -5016,14 +6709,14 @@
                 </a:solidFill>
                 <a:latin typeface="Calibri"/>
               </a:rPr>
-              <a:t>The theory's prediction is precise: equilibrium effort (and so, achievement) should be proportional to Katz-Bonacich centrality b(g,φ) — not to raw popularity, not to any other network measure. φ is exactly the decay parameter we test empirically. In the original paper's own AddHealth test, a 1-SD rise in centrality raised school performance by 7% of a SD.</a:t>
-            </a:r>
-          </a:p>
-        </p:txBody>
-      </p:sp>
-      <p:sp>
-        <p:nvSpPr>
-          <p:cNvPr id="13" name="TextBox 12"/>
+              <a:t>A sharp, falsifiable claim: achievement should track Katz-Bonacich centrality b(g,φ) — not raw popularity, not any other network measure. φ is the model's own parameter, and the one we vary in the data. In the original AddHealth study, a 1-SD rise in centrality raised school performance by about 7% of a SD.</a:t>
+            </a:r>
+          </a:p>
+        </p:txBody>
+      </p:sp>
+      <p:sp>
+        <p:nvSpPr>
+          <p:cNvPr id="14" name="TextBox 13"/>
           <p:cNvSpPr txBox="1"/>
           <p:nvPr/>
         </p:nvSpPr>
@@ -5131,7 +6824,7 @@
         <p:spPr>
           <a:xfrm>
             <a:off x="640080" y="365760"/>
-            <a:ext cx="8229600" cy="365760"/>
+            <a:ext cx="10058400" cy="365760"/>
           </a:xfrm>
           <a:prstGeom prst="rect">
             <a:avLst/>
@@ -5156,7 +6849,7 @@
                 </a:solidFill>
                 <a:latin typeface="Calibri"/>
               </a:rPr>
-              <a:t>PREDICTIONS</a:t>
+              <a:t>THE KEY IDEA</a:t>
             </a:r>
           </a:p>
         </p:txBody>
@@ -5169,8 +6862,8 @@
         </p:nvSpPr>
         <p:spPr>
           <a:xfrm>
-            <a:off x="640080" y="685800"/>
-            <a:ext cx="10881360" cy="914400"/>
+            <a:off x="640080" y="713232"/>
+            <a:ext cx="10972800" cy="914400"/>
           </a:xfrm>
           <a:prstGeom prst="rect">
             <a:avLst/>
@@ -5185,78 +6878,45 @@
           <a:p>
             <a:pPr algn="l">
               <a:lnSpc>
-                <a:spcPct val="115000"/>
-              </a:lnSpc>
-            </a:pPr>
-            <a:r>
-              <a:rPr sz="2800" b="1" i="0">
+                <a:spcPct val="108000"/>
+              </a:lnSpc>
+            </a:pPr>
+            <a:r>
+              <a:rPr sz="2700" b="1" i="0">
                 <a:solidFill>
                   <a:srgbClr val="19180F"/>
                 </a:solidFill>
                 <a:latin typeface="Georgia"/>
               </a:rPr>
-              <a:t>What the theory — and the replication — predict</a:t>
-            </a:r>
-          </a:p>
-        </p:txBody>
-      </p:sp>
-      <p:sp>
-        <p:nvSpPr>
-          <p:cNvPr id="5" name="Rounded Rectangle 4"/>
-          <p:cNvSpPr/>
-          <p:nvPr/>
-        </p:nvSpPr>
-        <p:spPr>
-          <a:xfrm>
-            <a:off x="640080" y="1600200"/>
-            <a:ext cx="10515600" cy="457200"/>
-          </a:xfrm>
-          <a:prstGeom prst="roundRect">
-            <a:avLst>
-              <a:gd name="adj" fmla="val 12000"/>
-            </a:avLst>
-          </a:prstGeom>
-          <a:solidFill>
-            <a:srgbClr val="2A78D6"/>
-          </a:solidFill>
-          <a:ln w="15875">
-            <a:solidFill>
-              <a:srgbClr val="DDD8CD"/>
-            </a:solidFill>
-          </a:ln>
-          <a:effectLst/>
-        </p:spPr>
-        <p:style>
-          <a:lnRef idx="1">
-            <a:schemeClr val="accent1"/>
-          </a:lnRef>
-          <a:fillRef idx="3">
-            <a:schemeClr val="accent1"/>
-          </a:fillRef>
-          <a:effectRef idx="2">
-            <a:schemeClr val="accent1"/>
-          </a:effectRef>
-          <a:fontRef idx="minor">
-            <a:schemeClr val="lt1"/>
-          </a:fontRef>
-        </p:style>
-        <p:txBody>
-          <a:bodyPr rtlCol="0" anchor="ctr" wrap="square" lIns="109728" rIns="109728"/>
-          <a:lstStyle/>
-          <a:p>
-            <a:pPr algn="l"/>
-            <a:r>
-              <a:rPr sz="1300" b="1">
-                <a:solidFill>
-                  <a:srgbClr val="FFFFFF"/>
-                </a:solidFill>
-                <a:latin typeface="Calibri"/>
-              </a:rPr>
-              <a:t>FROM THE MODEL</a:t>
-            </a:r>
-          </a:p>
-        </p:txBody>
-      </p:sp>
+              <a:t>φ is a dial — from popularity to reach</a:t>
+            </a:r>
+          </a:p>
+        </p:txBody>
+      </p:sp>
+      <p:pic>
+        <p:nvPicPr>
+          <p:cNvPr id="5" name="Picture 4" descr="phi_dial.png"/>
+          <p:cNvPicPr>
+            <a:picLocks noChangeAspect="1"/>
+          </p:cNvPicPr>
+          <p:nvPr/>
+        </p:nvPicPr>
+        <p:blipFill>
+          <a:blip r:embed="rId2"/>
+          <a:stretch>
+            <a:fillRect/>
+          </a:stretch>
+        </p:blipFill>
+        <p:spPr>
+          <a:xfrm>
+            <a:off x="655167" y="1417320"/>
+            <a:ext cx="10881360" cy="3966270"/>
+          </a:xfrm>
+          <a:prstGeom prst="rect">
+            <a:avLst/>
+          </a:prstGeom>
+        </p:spPr>
+      </p:pic>
       <p:sp>
         <p:nvSpPr>
           <p:cNvPr id="6" name="Rounded Rectangle 5"/>
@@ -5265,182 +6925,8 @@
         </p:nvSpPr>
         <p:spPr>
           <a:xfrm>
-            <a:off x="640080" y="2103120"/>
-            <a:ext cx="10515600" cy="960120"/>
-          </a:xfrm>
-          <a:prstGeom prst="roundRect">
-            <a:avLst>
-              <a:gd name="adj" fmla="val 12000"/>
-            </a:avLst>
-          </a:prstGeom>
-          <a:solidFill>
-            <a:srgbClr val="FFFFFF"/>
-          </a:solidFill>
-          <a:ln w="15875">
-            <a:solidFill>
-              <a:srgbClr val="EB6834"/>
-            </a:solidFill>
-          </a:ln>
-          <a:effectLst/>
-        </p:spPr>
-        <p:style>
-          <a:lnRef idx="1">
-            <a:schemeClr val="accent1"/>
-          </a:lnRef>
-          <a:fillRef idx="3">
-            <a:schemeClr val="accent1"/>
-          </a:fillRef>
-          <a:effectRef idx="2">
-            <a:schemeClr val="accent1"/>
-          </a:effectRef>
-          <a:fontRef idx="minor">
-            <a:schemeClr val="lt1"/>
-          </a:fontRef>
-        </p:style>
-        <p:txBody>
-          <a:bodyPr rtlCol="0" anchor="ctr" wrap="square" lIns="109728" rIns="109728"/>
-          <a:lstStyle/>
-          <a:p>
-            <a:pPr algn="ctr"/>
-            <a:r>
-              <a:rPr sz="1400" b="0">
-                <a:solidFill>
-                  <a:srgbClr val="19180F"/>
-                </a:solidFill>
-                <a:latin typeface="Calibri"/>
-              </a:rPr>
-              <a:t/>
-            </a:r>
-          </a:p>
-        </p:txBody>
-      </p:sp>
-      <p:sp>
-        <p:nvSpPr>
-          <p:cNvPr id="7" name="TextBox 6"/>
-          <p:cNvSpPr txBox="1"/>
-          <p:nvPr/>
-        </p:nvSpPr>
-        <p:spPr>
-          <a:xfrm>
-            <a:off x="914400" y="2212848"/>
-            <a:ext cx="731520" cy="731520"/>
-          </a:xfrm>
-          <a:prstGeom prst="rect">
-            <a:avLst/>
-          </a:prstGeom>
-          <a:noFill/>
-        </p:spPr>
-        <p:txBody>
-          <a:bodyPr wrap="square" anchor="t">
-            <a:spAutoFit/>
-          </a:bodyPr>
-          <a:lstStyle/>
-          <a:p>
-            <a:pPr algn="l">
-              <a:lnSpc>
-                <a:spcPct val="115000"/>
-              </a:lnSpc>
-            </a:pPr>
-            <a:r>
-              <a:rPr sz="2800" b="1" i="0">
-                <a:solidFill>
-                  <a:srgbClr val="EB6834"/>
-                </a:solidFill>
-                <a:latin typeface="Georgia"/>
-              </a:rPr>
-              <a:t>1</a:t>
-            </a:r>
-          </a:p>
-        </p:txBody>
-      </p:sp>
-      <p:sp>
-        <p:nvSpPr>
-          <p:cNvPr id="8" name="TextBox 7"/>
-          <p:cNvSpPr txBox="1"/>
-          <p:nvPr/>
-        </p:nvSpPr>
-        <p:spPr>
-          <a:xfrm>
-            <a:off x="1737360" y="2212848"/>
-            <a:ext cx="9144000" cy="731520"/>
-          </a:xfrm>
-          <a:prstGeom prst="rect">
-            <a:avLst/>
-          </a:prstGeom>
-          <a:noFill/>
-        </p:spPr>
-        <p:txBody>
-          <a:bodyPr wrap="square" anchor="t">
-            <a:spAutoFit/>
-          </a:bodyPr>
-          <a:lstStyle/>
-          <a:p>
-            <a:pPr algn="l">
-              <a:lnSpc>
-                <a:spcPct val="130000"/>
-              </a:lnSpc>
-            </a:pPr>
-            <a:r>
-              <a:rPr sz="1600" b="0" i="0">
-                <a:solidFill>
-                  <a:srgbClr val="19180F"/>
-                </a:solidFill>
-                <a:latin typeface="Calibri"/>
-              </a:rPr>
-              <a:t>Katz-Bonacich centrality predicts GPA — even after we control for friend-group composition. The theory's core, falsifiable claim.</a:t>
-            </a:r>
-          </a:p>
-        </p:txBody>
-      </p:sp>
-      <p:sp>
-        <p:nvSpPr>
-          <p:cNvPr id="9" name="TextBox 8"/>
-          <p:cNvSpPr txBox="1"/>
-          <p:nvPr/>
-        </p:nvSpPr>
-        <p:spPr>
-          <a:xfrm>
-            <a:off x="868680" y="3246120"/>
-            <a:ext cx="6400800" cy="365760"/>
-          </a:xfrm>
-          <a:prstGeom prst="rect">
-            <a:avLst/>
-          </a:prstGeom>
-          <a:noFill/>
-        </p:spPr>
-        <p:txBody>
-          <a:bodyPr wrap="square" anchor="t">
-            <a:spAutoFit/>
-          </a:bodyPr>
-          <a:lstStyle/>
-          <a:p>
-            <a:pPr algn="l">
-              <a:lnSpc>
-                <a:spcPct val="115000"/>
-              </a:lnSpc>
-            </a:pPr>
-            <a:r>
-              <a:rPr sz="1300" b="1" i="0">
-                <a:solidFill>
-                  <a:srgbClr val="55503F"/>
-                </a:solidFill>
-                <a:latin typeface="Calibri"/>
-              </a:rPr>
-              <a:t>FROM REPLICATING SMIRNOV &amp; THURNER</a:t>
-            </a:r>
-          </a:p>
-        </p:txBody>
-      </p:sp>
-      <p:sp>
-        <p:nvSpPr>
-          <p:cNvPr id="10" name="Rounded Rectangle 9"/>
-          <p:cNvSpPr/>
-          <p:nvPr/>
-        </p:nvSpPr>
-        <p:spPr>
-          <a:xfrm>
-            <a:off x="640080" y="3657600"/>
-            <a:ext cx="5120640" cy="1143000"/>
+            <a:off x="822960" y="5623560"/>
+            <a:ext cx="10515600" cy="914400"/>
           </a:xfrm>
           <a:prstGeom prst="roundRect">
             <a:avLst>
@@ -5477,503 +6963,20 @@
           <a:p>
             <a:pPr algn="ctr"/>
             <a:r>
-              <a:rPr sz="1400" b="0">
+              <a:rPr sz="1500" b="0">
                 <a:solidFill>
                   <a:srgbClr val="19180F"/>
                 </a:solidFill>
                 <a:latin typeface="Calibri"/>
               </a:rPr>
-              <a:t/>
-            </a:r>
-          </a:p>
-        </p:txBody>
-      </p:sp>
-      <p:sp>
-        <p:nvSpPr>
-          <p:cNvPr id="11" name="TextBox 10"/>
-          <p:cNvSpPr txBox="1"/>
-          <p:nvPr/>
-        </p:nvSpPr>
-        <p:spPr>
-          <a:xfrm>
-            <a:off x="822960" y="3767328"/>
-            <a:ext cx="548640" cy="548640"/>
-          </a:xfrm>
-          <a:prstGeom prst="rect">
-            <a:avLst/>
-          </a:prstGeom>
-          <a:noFill/>
-        </p:spPr>
-        <p:txBody>
-          <a:bodyPr wrap="square" anchor="t">
-            <a:spAutoFit/>
-          </a:bodyPr>
-          <a:lstStyle/>
-          <a:p>
-            <a:pPr algn="l">
-              <a:lnSpc>
-                <a:spcPct val="115000"/>
-              </a:lnSpc>
-            </a:pPr>
-            <a:r>
-              <a:rPr sz="2000" b="1" i="0">
-                <a:solidFill>
-                  <a:srgbClr val="55503F"/>
-                </a:solidFill>
-                <a:latin typeface="Georgia"/>
-              </a:rPr>
-              <a:t>2</a:t>
-            </a:r>
-          </a:p>
-        </p:txBody>
-      </p:sp>
-      <p:sp>
-        <p:nvSpPr>
-          <p:cNvPr id="12" name="TextBox 11"/>
-          <p:cNvSpPr txBox="1"/>
-          <p:nvPr/>
-        </p:nvSpPr>
-        <p:spPr>
-          <a:xfrm>
-            <a:off x="1371600" y="3767328"/>
-            <a:ext cx="4206240" cy="914400"/>
-          </a:xfrm>
-          <a:prstGeom prst="rect">
-            <a:avLst/>
-          </a:prstGeom>
-          <a:noFill/>
-        </p:spPr>
-        <p:txBody>
-          <a:bodyPr wrap="square" anchor="t">
-            <a:spAutoFit/>
-          </a:bodyPr>
-          <a:lstStyle/>
-          <a:p>
-            <a:pPr algn="l">
-              <a:lnSpc>
-                <a:spcPct val="125000"/>
-              </a:lnSpc>
-            </a:pPr>
-            <a:r>
-              <a:rPr sz="1350" b="0" i="0">
-                <a:solidFill>
-                  <a:srgbClr val="19180F"/>
-                </a:solidFill>
-                <a:latin typeface="Calibri"/>
-              </a:rPr>
-              <a:t>A friend's past GPA will not predict a student's future GPA, once we control for their own past GPA.</a:t>
-            </a:r>
-          </a:p>
-        </p:txBody>
-      </p:sp>
-      <p:sp>
-        <p:nvSpPr>
-          <p:cNvPr id="13" name="Rounded Rectangle 12"/>
-          <p:cNvSpPr/>
-          <p:nvPr/>
-        </p:nvSpPr>
-        <p:spPr>
-          <a:xfrm>
-            <a:off x="6035040" y="3657600"/>
-            <a:ext cx="5120640" cy="1143000"/>
-          </a:xfrm>
-          <a:prstGeom prst="roundRect">
-            <a:avLst>
-              <a:gd name="adj" fmla="val 12000"/>
-            </a:avLst>
-          </a:prstGeom>
-          <a:solidFill>
-            <a:srgbClr val="F1EFE8"/>
-          </a:solidFill>
-          <a:ln w="15875">
-            <a:solidFill>
-              <a:srgbClr val="DDD8CD"/>
-            </a:solidFill>
-          </a:ln>
-          <a:effectLst/>
-        </p:spPr>
-        <p:style>
-          <a:lnRef idx="1">
-            <a:schemeClr val="accent1"/>
-          </a:lnRef>
-          <a:fillRef idx="3">
-            <a:schemeClr val="accent1"/>
-          </a:fillRef>
-          <a:effectRef idx="2">
-            <a:schemeClr val="accent1"/>
-          </a:effectRef>
-          <a:fontRef idx="minor">
-            <a:schemeClr val="lt1"/>
-          </a:fontRef>
-        </p:style>
-        <p:txBody>
-          <a:bodyPr rtlCol="0" anchor="ctr" wrap="square" lIns="109728" rIns="109728"/>
-          <a:lstStyle/>
-          <a:p>
-            <a:pPr algn="ctr"/>
-            <a:r>
-              <a:rPr sz="1400" b="0">
-                <a:solidFill>
-                  <a:srgbClr val="19180F"/>
-                </a:solidFill>
-                <a:latin typeface="Calibri"/>
-              </a:rPr>
-              <a:t/>
-            </a:r>
-          </a:p>
-        </p:txBody>
-      </p:sp>
-      <p:sp>
-        <p:nvSpPr>
-          <p:cNvPr id="14" name="TextBox 13"/>
-          <p:cNvSpPr txBox="1"/>
-          <p:nvPr/>
-        </p:nvSpPr>
-        <p:spPr>
-          <a:xfrm>
-            <a:off x="6217920" y="3767328"/>
-            <a:ext cx="548640" cy="548640"/>
-          </a:xfrm>
-          <a:prstGeom prst="rect">
-            <a:avLst/>
-          </a:prstGeom>
-          <a:noFill/>
-        </p:spPr>
-        <p:txBody>
-          <a:bodyPr wrap="square" anchor="t">
-            <a:spAutoFit/>
-          </a:bodyPr>
-          <a:lstStyle/>
-          <a:p>
-            <a:pPr algn="l">
-              <a:lnSpc>
-                <a:spcPct val="115000"/>
-              </a:lnSpc>
-            </a:pPr>
-            <a:r>
-              <a:rPr sz="2000" b="1" i="0">
-                <a:solidFill>
-                  <a:srgbClr val="55503F"/>
-                </a:solidFill>
-                <a:latin typeface="Georgia"/>
-              </a:rPr>
-              <a:t>3</a:t>
-            </a:r>
-          </a:p>
-        </p:txBody>
-      </p:sp>
-      <p:sp>
-        <p:nvSpPr>
-          <p:cNvPr id="15" name="TextBox 14"/>
-          <p:cNvSpPr txBox="1"/>
-          <p:nvPr/>
-        </p:nvSpPr>
-        <p:spPr>
-          <a:xfrm>
-            <a:off x="6766560" y="3767328"/>
-            <a:ext cx="4206240" cy="914400"/>
-          </a:xfrm>
-          <a:prstGeom prst="rect">
-            <a:avLst/>
-          </a:prstGeom>
-          <a:noFill/>
-        </p:spPr>
-        <p:txBody>
-          <a:bodyPr wrap="square" anchor="t">
-            <a:spAutoFit/>
-          </a:bodyPr>
-          <a:lstStyle/>
-          <a:p>
-            <a:pPr algn="l">
-              <a:lnSpc>
-                <a:spcPct val="125000"/>
-              </a:lnSpc>
-            </a:pPr>
-            <a:r>
-              <a:rPr sz="1350" b="0" i="0">
-                <a:solidFill>
-                  <a:srgbClr val="19180F"/>
-                </a:solidFill>
-                <a:latin typeface="Calibri"/>
-              </a:rPr>
-              <a:t>New friendships will show a smaller GPA gap than dropped friendships — a sign of selection.</a:t>
-            </a:r>
-          </a:p>
-        </p:txBody>
-      </p:sp>
-      <p:sp>
-        <p:nvSpPr>
-          <p:cNvPr id="16" name="Rounded Rectangle 15"/>
-          <p:cNvSpPr/>
-          <p:nvPr/>
-        </p:nvSpPr>
-        <p:spPr>
-          <a:xfrm>
-            <a:off x="640080" y="4965192"/>
-            <a:ext cx="5120640" cy="1143000"/>
-          </a:xfrm>
-          <a:prstGeom prst="roundRect">
-            <a:avLst>
-              <a:gd name="adj" fmla="val 12000"/>
-            </a:avLst>
-          </a:prstGeom>
-          <a:solidFill>
-            <a:srgbClr val="F1EFE8"/>
-          </a:solidFill>
-          <a:ln w="15875">
-            <a:solidFill>
-              <a:srgbClr val="DDD8CD"/>
-            </a:solidFill>
-          </a:ln>
-          <a:effectLst/>
-        </p:spPr>
-        <p:style>
-          <a:lnRef idx="1">
-            <a:schemeClr val="accent1"/>
-          </a:lnRef>
-          <a:fillRef idx="3">
-            <a:schemeClr val="accent1"/>
-          </a:fillRef>
-          <a:effectRef idx="2">
-            <a:schemeClr val="accent1"/>
-          </a:effectRef>
-          <a:fontRef idx="minor">
-            <a:schemeClr val="lt1"/>
-          </a:fontRef>
-        </p:style>
-        <p:txBody>
-          <a:bodyPr rtlCol="0" anchor="ctr" wrap="square" lIns="109728" rIns="109728"/>
-          <a:lstStyle/>
-          <a:p>
-            <a:pPr algn="ctr"/>
-            <a:r>
-              <a:rPr sz="1400" b="0">
-                <a:solidFill>
-                  <a:srgbClr val="19180F"/>
-                </a:solidFill>
-                <a:latin typeface="Calibri"/>
-              </a:rPr>
-              <a:t/>
-            </a:r>
-          </a:p>
-        </p:txBody>
-      </p:sp>
-      <p:sp>
-        <p:nvSpPr>
-          <p:cNvPr id="17" name="TextBox 16"/>
-          <p:cNvSpPr txBox="1"/>
-          <p:nvPr/>
-        </p:nvSpPr>
-        <p:spPr>
-          <a:xfrm>
-            <a:off x="822960" y="5074920"/>
-            <a:ext cx="548640" cy="548640"/>
-          </a:xfrm>
-          <a:prstGeom prst="rect">
-            <a:avLst/>
-          </a:prstGeom>
-          <a:noFill/>
-        </p:spPr>
-        <p:txBody>
-          <a:bodyPr wrap="square" anchor="t">
-            <a:spAutoFit/>
-          </a:bodyPr>
-          <a:lstStyle/>
-          <a:p>
-            <a:pPr algn="l">
-              <a:lnSpc>
-                <a:spcPct val="115000"/>
-              </a:lnSpc>
-            </a:pPr>
-            <a:r>
-              <a:rPr sz="2000" b="1" i="0">
-                <a:solidFill>
-                  <a:srgbClr val="55503F"/>
-                </a:solidFill>
-                <a:latin typeface="Georgia"/>
-              </a:rPr>
-              <a:t>4</a:t>
-            </a:r>
-          </a:p>
-        </p:txBody>
-      </p:sp>
-      <p:sp>
-        <p:nvSpPr>
-          <p:cNvPr id="18" name="TextBox 17"/>
-          <p:cNvSpPr txBox="1"/>
-          <p:nvPr/>
-        </p:nvSpPr>
-        <p:spPr>
-          <a:xfrm>
-            <a:off x="1371600" y="5074920"/>
-            <a:ext cx="4206240" cy="914400"/>
-          </a:xfrm>
-          <a:prstGeom prst="rect">
-            <a:avLst/>
-          </a:prstGeom>
-          <a:noFill/>
-        </p:spPr>
-        <p:txBody>
-          <a:bodyPr wrap="square" anchor="t">
-            <a:spAutoFit/>
-          </a:bodyPr>
-          <a:lstStyle/>
-          <a:p>
-            <a:pPr algn="l">
-              <a:lnSpc>
-                <a:spcPct val="125000"/>
-              </a:lnSpc>
-            </a:pPr>
-            <a:r>
-              <a:rPr sz="1350" b="0" i="0">
-                <a:solidFill>
-                  <a:srgbClr val="19180F"/>
-                </a:solidFill>
-                <a:latin typeface="Calibri"/>
-              </a:rPr>
-              <a:t>The selection effect will be stronger in university than high school (more freedom to change circles).</a:t>
-            </a:r>
-          </a:p>
-        </p:txBody>
-      </p:sp>
-      <p:sp>
-        <p:nvSpPr>
-          <p:cNvPr id="19" name="Rounded Rectangle 18"/>
-          <p:cNvSpPr/>
-          <p:nvPr/>
-        </p:nvSpPr>
-        <p:spPr>
-          <a:xfrm>
-            <a:off x="6035040" y="4965192"/>
-            <a:ext cx="5120640" cy="1143000"/>
-          </a:xfrm>
-          <a:prstGeom prst="roundRect">
-            <a:avLst>
-              <a:gd name="adj" fmla="val 12000"/>
-            </a:avLst>
-          </a:prstGeom>
-          <a:solidFill>
-            <a:srgbClr val="F1EFE8"/>
-          </a:solidFill>
-          <a:ln w="15875">
-            <a:solidFill>
-              <a:srgbClr val="DDD8CD"/>
-            </a:solidFill>
-          </a:ln>
-          <a:effectLst/>
-        </p:spPr>
-        <p:style>
-          <a:lnRef idx="1">
-            <a:schemeClr val="accent1"/>
-          </a:lnRef>
-          <a:fillRef idx="3">
-            <a:schemeClr val="accent1"/>
-          </a:fillRef>
-          <a:effectRef idx="2">
-            <a:schemeClr val="accent1"/>
-          </a:effectRef>
-          <a:fontRef idx="minor">
-            <a:schemeClr val="lt1"/>
-          </a:fontRef>
-        </p:style>
-        <p:txBody>
-          <a:bodyPr rtlCol="0" anchor="ctr" wrap="square" lIns="109728" rIns="109728"/>
-          <a:lstStyle/>
-          <a:p>
-            <a:pPr algn="ctr"/>
-            <a:r>
-              <a:rPr sz="1400" b="0">
-                <a:solidFill>
-                  <a:srgbClr val="19180F"/>
-                </a:solidFill>
-                <a:latin typeface="Calibri"/>
-              </a:rPr>
-              <a:t/>
-            </a:r>
-          </a:p>
-        </p:txBody>
-      </p:sp>
-      <p:sp>
-        <p:nvSpPr>
-          <p:cNvPr id="20" name="TextBox 19"/>
-          <p:cNvSpPr txBox="1"/>
-          <p:nvPr/>
-        </p:nvSpPr>
-        <p:spPr>
-          <a:xfrm>
-            <a:off x="6217920" y="5074920"/>
-            <a:ext cx="548640" cy="548640"/>
-          </a:xfrm>
-          <a:prstGeom prst="rect">
-            <a:avLst/>
-          </a:prstGeom>
-          <a:noFill/>
-        </p:spPr>
-        <p:txBody>
-          <a:bodyPr wrap="square" anchor="t">
-            <a:spAutoFit/>
-          </a:bodyPr>
-          <a:lstStyle/>
-          <a:p>
-            <a:pPr algn="l">
-              <a:lnSpc>
-                <a:spcPct val="115000"/>
-              </a:lnSpc>
-            </a:pPr>
-            <a:r>
-              <a:rPr sz="2000" b="1" i="0">
-                <a:solidFill>
-                  <a:srgbClr val="55503F"/>
-                </a:solidFill>
-                <a:latin typeface="Georgia"/>
-              </a:rPr>
-              <a:t>5</a:t>
-            </a:r>
-          </a:p>
-        </p:txBody>
-      </p:sp>
-      <p:sp>
-        <p:nvSpPr>
-          <p:cNvPr id="21" name="TextBox 20"/>
-          <p:cNvSpPr txBox="1"/>
-          <p:nvPr/>
-        </p:nvSpPr>
-        <p:spPr>
-          <a:xfrm>
-            <a:off x="6766560" y="5074920"/>
-            <a:ext cx="4206240" cy="914400"/>
-          </a:xfrm>
-          <a:prstGeom prst="rect">
-            <a:avLst/>
-          </a:prstGeom>
-          <a:noFill/>
-        </p:spPr>
-        <p:txBody>
-          <a:bodyPr wrap="square" anchor="t">
-            <a:spAutoFit/>
-          </a:bodyPr>
-          <a:lstStyle/>
-          <a:p>
-            <a:pPr algn="l">
-              <a:lnSpc>
-                <a:spcPct val="125000"/>
-              </a:lnSpc>
-            </a:pPr>
-            <a:r>
-              <a:rPr sz="1350" b="0" i="0">
-                <a:solidFill>
-                  <a:srgbClr val="19180F"/>
-                </a:solidFill>
-                <a:latin typeface="Calibri"/>
-              </a:rPr>
-              <a:t>The model-implied centrality effect may differ by setting — worth testing high school vs. university.</a:t>
-            </a:r>
-          </a:p>
-        </p:txBody>
-      </p:sp>
-      <p:sp>
-        <p:nvSpPr>
-          <p:cNvPr id="22" name="TextBox 21"/>
+              <a:t>Turn φ up and the same formula stops asking “how many friends?” and starts asking “where in the network?” — we test GPA against the whole dial.</a:t>
+            </a:r>
+          </a:p>
+        </p:txBody>
+      </p:sp>
+      <p:sp>
+        <p:nvSpPr>
+          <p:cNvPr id="7" name="TextBox 6"/>
           <p:cNvSpPr txBox="1"/>
           <p:nvPr/>
         </p:nvSpPr>
@@ -6081,7 +7084,7 @@
         <p:spPr>
           <a:xfrm>
             <a:off x="640080" y="365760"/>
-            <a:ext cx="8229600" cy="365760"/>
+            <a:ext cx="10058400" cy="365760"/>
           </a:xfrm>
           <a:prstGeom prst="rect">
             <a:avLst/>
@@ -6106,7 +7109,7 @@
                 </a:solidFill>
                 <a:latin typeface="Calibri"/>
               </a:rPr>
-              <a:t>THE DATA</a:t>
+              <a:t>PREDICTIONS</a:t>
             </a:r>
           </a:p>
         </p:txBody>
@@ -6119,8 +7122,8 @@
         </p:nvSpPr>
         <p:spPr>
           <a:xfrm>
-            <a:off x="640080" y="685800"/>
-            <a:ext cx="10881360" cy="914400"/>
+            <a:off x="640080" y="713232"/>
+            <a:ext cx="10972800" cy="914400"/>
           </a:xfrm>
           <a:prstGeom prst="rect">
             <a:avLst/>
@@ -6135,45 +7138,78 @@
           <a:p>
             <a:pPr algn="l">
               <a:lnSpc>
-                <a:spcPct val="115000"/>
-              </a:lnSpc>
-            </a:pPr>
-            <a:r>
-              <a:rPr sz="2800" b="1" i="0">
+                <a:spcPct val="108000"/>
+              </a:lnSpc>
+            </a:pPr>
+            <a:r>
+              <a:rPr sz="2700" b="1" i="0">
                 <a:solidFill>
                   <a:srgbClr val="19180F"/>
                 </a:solidFill>
                 <a:latin typeface="Georgia"/>
               </a:rPr>
-              <a:t>A real, directed friendship network</a:t>
-            </a:r>
-          </a:p>
-        </p:txBody>
-      </p:sp>
-      <p:pic>
-        <p:nvPicPr>
-          <p:cNvPr id="5" name="Picture 4" descr="real_network_school.png"/>
-          <p:cNvPicPr>
-            <a:picLocks noChangeAspect="1"/>
-          </p:cNvPicPr>
-          <p:nvPr/>
-        </p:nvPicPr>
-        <p:blipFill>
-          <a:blip r:embed="rId2"/>
-          <a:stretch>
-            <a:fillRect/>
-          </a:stretch>
-        </p:blipFill>
-        <p:spPr>
-          <a:xfrm>
-            <a:off x="5394960" y="1417320"/>
-            <a:ext cx="6783045" cy="5120640"/>
-          </a:xfrm>
-          <a:prstGeom prst="rect">
-            <a:avLst/>
-          </a:prstGeom>
-        </p:spPr>
-      </p:pic>
+              <a:t>What we expect — and what would prove us wrong</a:t>
+            </a:r>
+          </a:p>
+        </p:txBody>
+      </p:sp>
+      <p:sp>
+        <p:nvSpPr>
+          <p:cNvPr id="5" name="Rounded Rectangle 4"/>
+          <p:cNvSpPr/>
+          <p:nvPr/>
+        </p:nvSpPr>
+        <p:spPr>
+          <a:xfrm>
+            <a:off x="640080" y="1554480"/>
+            <a:ext cx="10927080" cy="420624"/>
+          </a:xfrm>
+          <a:prstGeom prst="roundRect">
+            <a:avLst>
+              <a:gd name="adj" fmla="val 12000"/>
+            </a:avLst>
+          </a:prstGeom>
+          <a:solidFill>
+            <a:srgbClr val="2A78D6"/>
+          </a:solidFill>
+          <a:ln w="15875">
+            <a:solidFill>
+              <a:srgbClr val="DDD8CD"/>
+            </a:solidFill>
+          </a:ln>
+          <a:effectLst/>
+        </p:spPr>
+        <p:style>
+          <a:lnRef idx="1">
+            <a:schemeClr val="accent1"/>
+          </a:lnRef>
+          <a:fillRef idx="3">
+            <a:schemeClr val="accent1"/>
+          </a:fillRef>
+          <a:effectRef idx="2">
+            <a:schemeClr val="accent1"/>
+          </a:effectRef>
+          <a:fontRef idx="minor">
+            <a:schemeClr val="lt1"/>
+          </a:fontRef>
+        </p:style>
+        <p:txBody>
+          <a:bodyPr rtlCol="0" anchor="ctr" wrap="square" lIns="109728" rIns="109728"/>
+          <a:lstStyle/>
+          <a:p>
+            <a:pPr algn="l"/>
+            <a:r>
+              <a:rPr sz="1250" b="1">
+                <a:solidFill>
+                  <a:srgbClr val="FFFFFF"/>
+                </a:solidFill>
+                <a:latin typeface="Calibri"/>
+              </a:rPr>
+              <a:t>FROM THE MODEL</a:t>
+            </a:r>
+          </a:p>
+        </p:txBody>
+      </p:sp>
       <p:sp>
         <p:nvSpPr>
           <p:cNvPr id="6" name="TextBox 5"/>
@@ -6182,8 +7218,8 @@
         </p:nvSpPr>
         <p:spPr>
           <a:xfrm>
-            <a:off x="640080" y="1691640"/>
-            <a:ext cx="4480560" cy="365760"/>
+            <a:off x="685800" y="2048256"/>
+            <a:ext cx="10835640" cy="914400"/>
           </a:xfrm>
           <a:prstGeom prst="rect">
             <a:avLst/>
@@ -6198,17 +7234,17 @@
           <a:p>
             <a:pPr algn="l">
               <a:lnSpc>
-                <a:spcPct val="115000"/>
-              </a:lnSpc>
-            </a:pPr>
-            <a:r>
-              <a:rPr sz="1400" b="1" i="0">
-                <a:solidFill>
-                  <a:srgbClr val="2A78D6"/>
-                </a:solidFill>
-                <a:latin typeface="Calibri"/>
-              </a:rPr>
-              <a:t>NODES</a:t>
+                <a:spcPct val="128000"/>
+              </a:lnSpc>
+            </a:pPr>
+            <a:r>
+              <a:rPr sz="1500" b="0" i="0">
+                <a:solidFill>
+                  <a:srgbClr val="19180F"/>
+                </a:solidFill>
+                <a:latin typeface="Calibri"/>
+              </a:rPr>
+              <a:t>Katz-Bonacich centrality predicts next-term GPA — even after friend-group GPA and raw degree are controlled. Falsified if it loses significance once degree is in, or if it flips sign along the φ dial.</a:t>
             </a:r>
           </a:p>
         </p:txBody>
@@ -6221,8 +7257,8 @@
         </p:nvSpPr>
         <p:spPr>
           <a:xfrm>
-            <a:off x="640080" y="2057400"/>
-            <a:ext cx="4480560" cy="914400"/>
+            <a:off x="685800" y="3200400"/>
+            <a:ext cx="10058400" cy="320040"/>
           </a:xfrm>
           <a:prstGeom prst="rect">
             <a:avLst/>
@@ -6237,31 +7273,88 @@
           <a:p>
             <a:pPr algn="l">
               <a:lnSpc>
-                <a:spcPct val="130000"/>
-              </a:lnSpc>
-            </a:pPr>
-            <a:r>
-              <a:rPr sz="1400" b="0" i="0">
+                <a:spcPct val="115000"/>
+              </a:lnSpc>
+            </a:pPr>
+            <a:r>
+              <a:rPr sz="1250" b="1" i="0">
+                <a:solidFill>
+                  <a:srgbClr val="55503F"/>
+                </a:solidFill>
+                <a:latin typeface="Calibri"/>
+              </a:rPr>
+              <a:t>IF IT PREDICTS — WHICH DIRECTION?</a:t>
+            </a:r>
+          </a:p>
+        </p:txBody>
+      </p:sp>
+      <p:sp>
+        <p:nvSpPr>
+          <p:cNvPr id="8" name="Rounded Rectangle 7"/>
+          <p:cNvSpPr/>
+          <p:nvPr/>
+        </p:nvSpPr>
+        <p:spPr>
+          <a:xfrm>
+            <a:off x="640080" y="3566160"/>
+            <a:ext cx="3502152" cy="914400"/>
+          </a:xfrm>
+          <a:prstGeom prst="roundRect">
+            <a:avLst>
+              <a:gd name="adj" fmla="val 12000"/>
+            </a:avLst>
+          </a:prstGeom>
+          <a:solidFill>
+            <a:srgbClr val="F1EFE8"/>
+          </a:solidFill>
+          <a:ln w="15875">
+            <a:solidFill>
+              <a:srgbClr val="DDD8CD"/>
+            </a:solidFill>
+          </a:ln>
+          <a:effectLst/>
+        </p:spPr>
+        <p:style>
+          <a:lnRef idx="1">
+            <a:schemeClr val="accent1"/>
+          </a:lnRef>
+          <a:fillRef idx="3">
+            <a:schemeClr val="accent1"/>
+          </a:fillRef>
+          <a:effectRef idx="2">
+            <a:schemeClr val="accent1"/>
+          </a:effectRef>
+          <a:fontRef idx="minor">
+            <a:schemeClr val="lt1"/>
+          </a:fontRef>
+        </p:style>
+        <p:txBody>
+          <a:bodyPr rtlCol="0" anchor="ctr" wrap="square" lIns="109728" rIns="109728"/>
+          <a:lstStyle/>
+          <a:p>
+            <a:pPr algn="ctr"/>
+            <a:r>
+              <a:rPr sz="1400" b="0">
                 <a:solidFill>
                   <a:srgbClr val="19180F"/>
                 </a:solidFill>
                 <a:latin typeface="Calibri"/>
               </a:rPr>
-              <a:t>Individual students — 655 high-school; 1,200–1,549 per university class-year</a:t>
-            </a:r>
-          </a:p>
-        </p:txBody>
-      </p:sp>
-      <p:sp>
-        <p:nvSpPr>
-          <p:cNvPr id="8" name="TextBox 7"/>
+              <a:t/>
+            </a:r>
+          </a:p>
+        </p:txBody>
+      </p:sp>
+      <p:sp>
+        <p:nvSpPr>
+          <p:cNvPr id="9" name="TextBox 8"/>
           <p:cNvSpPr txBox="1"/>
           <p:nvPr/>
         </p:nvSpPr>
         <p:spPr>
           <a:xfrm>
-            <a:off x="640080" y="2880360"/>
-            <a:ext cx="4480560" cy="365760"/>
+            <a:off x="822960" y="3657600"/>
+            <a:ext cx="3136392" cy="365760"/>
           </a:xfrm>
           <a:prstGeom prst="rect">
             <a:avLst/>
@@ -6280,27 +7373,27 @@
               </a:lnSpc>
             </a:pPr>
             <a:r>
-              <a:rPr sz="1400" b="1" i="0">
-                <a:solidFill>
-                  <a:srgbClr val="EB6834"/>
-                </a:solidFill>
-                <a:latin typeface="Calibri"/>
-              </a:rPr>
-              <a:t>EDGES</a:t>
-            </a:r>
-          </a:p>
-        </p:txBody>
-      </p:sp>
-      <p:sp>
-        <p:nvSpPr>
-          <p:cNvPr id="9" name="TextBox 8"/>
+              <a:rPr sz="1500" b="1" i="0">
+                <a:solidFill>
+                  <a:srgbClr val="19180F"/>
+                </a:solidFill>
+                <a:latin typeface="Georgia"/>
+              </a:rPr>
+              <a:t>β₁ &gt; 0</a:t>
+            </a:r>
+          </a:p>
+        </p:txBody>
+      </p:sp>
+      <p:sp>
+        <p:nvSpPr>
+          <p:cNvPr id="10" name="TextBox 9"/>
           <p:cNvSpPr txBox="1"/>
           <p:nvPr/>
         </p:nvSpPr>
         <p:spPr>
           <a:xfrm>
-            <a:off x="640080" y="3246120"/>
-            <a:ext cx="4480560" cy="1188720"/>
+            <a:off x="822960" y="4041648"/>
+            <a:ext cx="3136392" cy="457200"/>
           </a:xfrm>
           <a:prstGeom prst="rect">
             <a:avLst/>
@@ -6315,31 +7408,88 @@
           <a:p>
             <a:pPr algn="l">
               <a:lnSpc>
-                <a:spcPct val="130000"/>
-              </a:lnSpc>
-            </a:pPr>
-            <a:r>
-              <a:rPr sz="1400" b="0" i="0">
+                <a:spcPct val="115000"/>
+              </a:lnSpc>
+            </a:pPr>
+            <a:r>
+              <a:rPr sz="1250" b="0" i="0">
+                <a:solidFill>
+                  <a:srgbClr val="55503F"/>
+                </a:solidFill>
+                <a:latin typeface="Calibri"/>
+              </a:rPr>
+              <a:t>access to help lifts grades</a:t>
+            </a:r>
+          </a:p>
+        </p:txBody>
+      </p:sp>
+      <p:sp>
+        <p:nvSpPr>
+          <p:cNvPr id="11" name="Rounded Rectangle 10"/>
+          <p:cNvSpPr/>
+          <p:nvPr/>
+        </p:nvSpPr>
+        <p:spPr>
+          <a:xfrm>
+            <a:off x="4343400" y="3566160"/>
+            <a:ext cx="3502152" cy="914400"/>
+          </a:xfrm>
+          <a:prstGeom prst="roundRect">
+            <a:avLst>
+              <a:gd name="adj" fmla="val 12000"/>
+            </a:avLst>
+          </a:prstGeom>
+          <a:solidFill>
+            <a:srgbClr val="F1EFE8"/>
+          </a:solidFill>
+          <a:ln w="15875">
+            <a:solidFill>
+              <a:srgbClr val="DDD8CD"/>
+            </a:solidFill>
+          </a:ln>
+          <a:effectLst/>
+        </p:spPr>
+        <p:style>
+          <a:lnRef idx="1">
+            <a:schemeClr val="accent1"/>
+          </a:lnRef>
+          <a:fillRef idx="3">
+            <a:schemeClr val="accent1"/>
+          </a:fillRef>
+          <a:effectRef idx="2">
+            <a:schemeClr val="accent1"/>
+          </a:effectRef>
+          <a:fontRef idx="minor">
+            <a:schemeClr val="lt1"/>
+          </a:fontRef>
+        </p:style>
+        <p:txBody>
+          <a:bodyPr rtlCol="0" anchor="ctr" wrap="square" lIns="109728" rIns="109728"/>
+          <a:lstStyle/>
+          <a:p>
+            <a:pPr algn="ctr"/>
+            <a:r>
+              <a:rPr sz="1400" b="0">
                 <a:solidFill>
                   <a:srgbClr val="19180F"/>
                 </a:solidFill>
                 <a:latin typeface="Calibri"/>
               </a:rPr>
-              <a:t>Directed “like” ties, 2–14 snapshots per group (38 total). Only 24–27% go both ways.</a:t>
-            </a:r>
-          </a:p>
-        </p:txBody>
-      </p:sp>
-      <p:sp>
-        <p:nvSpPr>
-          <p:cNvPr id="10" name="TextBox 9"/>
+              <a:t/>
+            </a:r>
+          </a:p>
+        </p:txBody>
+      </p:sp>
+      <p:sp>
+        <p:nvSpPr>
+          <p:cNvPr id="12" name="TextBox 11"/>
           <p:cNvSpPr txBox="1"/>
           <p:nvPr/>
         </p:nvSpPr>
         <p:spPr>
           <a:xfrm>
-            <a:off x="640080" y="4343400"/>
-            <a:ext cx="4480560" cy="365760"/>
+            <a:off x="4526280" y="3657600"/>
+            <a:ext cx="3136392" cy="365760"/>
           </a:xfrm>
           <a:prstGeom prst="rect">
             <a:avLst/>
@@ -6358,27 +7508,27 @@
               </a:lnSpc>
             </a:pPr>
             <a:r>
-              <a:rPr sz="1400" b="1" i="0">
+              <a:rPr sz="1500" b="1" i="0">
                 <a:solidFill>
                   <a:srgbClr val="19180F"/>
                 </a:solidFill>
-                <a:latin typeface="Calibri"/>
-              </a:rPr>
-              <a:t>ATTRIBUTES</a:t>
-            </a:r>
-          </a:p>
-        </p:txBody>
-      </p:sp>
-      <p:sp>
-        <p:nvSpPr>
-          <p:cNvPr id="11" name="TextBox 10"/>
+                <a:latin typeface="Georgia"/>
+              </a:rPr>
+              <a:t>β₁ = 0</a:t>
+            </a:r>
+          </a:p>
+        </p:txBody>
+      </p:sp>
+      <p:sp>
+        <p:nvSpPr>
+          <p:cNvPr id="13" name="TextBox 12"/>
           <p:cNvSpPr txBox="1"/>
           <p:nvPr/>
         </p:nvSpPr>
         <p:spPr>
           <a:xfrm>
-            <a:off x="640080" y="4709160"/>
-            <a:ext cx="4480560" cy="1188720"/>
+            <a:off x="4526280" y="4041648"/>
+            <a:ext cx="3136392" cy="457200"/>
           </a:xfrm>
           <a:prstGeom prst="rect">
             <a:avLst/>
@@ -6393,31 +7543,88 @@
           <a:p>
             <a:pPr algn="l">
               <a:lnSpc>
-                <a:spcPct val="130000"/>
-              </a:lnSpc>
-            </a:pPr>
-            <a:r>
-              <a:rPr sz="1400" b="0" i="0">
+                <a:spcPct val="115000"/>
+              </a:lnSpc>
+            </a:pPr>
+            <a:r>
+              <a:rPr sz="1250" b="0" i="0">
+                <a:solidFill>
+                  <a:srgbClr val="55503F"/>
+                </a:solidFill>
+                <a:latin typeface="Calibri"/>
+              </a:rPr>
+              <a:t>help and time-cost cancel</a:t>
+            </a:r>
+          </a:p>
+        </p:txBody>
+      </p:sp>
+      <p:sp>
+        <p:nvSpPr>
+          <p:cNvPr id="14" name="Rounded Rectangle 13"/>
+          <p:cNvSpPr/>
+          <p:nvPr/>
+        </p:nvSpPr>
+        <p:spPr>
+          <a:xfrm>
+            <a:off x="8046720" y="3566160"/>
+            <a:ext cx="3502152" cy="914400"/>
+          </a:xfrm>
+          <a:prstGeom prst="roundRect">
+            <a:avLst>
+              <a:gd name="adj" fmla="val 12000"/>
+            </a:avLst>
+          </a:prstGeom>
+          <a:solidFill>
+            <a:srgbClr val="F1EFE8"/>
+          </a:solidFill>
+          <a:ln w="15875">
+            <a:solidFill>
+              <a:srgbClr val="DDD8CD"/>
+            </a:solidFill>
+          </a:ln>
+          <a:effectLst/>
+        </p:spPr>
+        <p:style>
+          <a:lnRef idx="1">
+            <a:schemeClr val="accent1"/>
+          </a:lnRef>
+          <a:fillRef idx="3">
+            <a:schemeClr val="accent1"/>
+          </a:fillRef>
+          <a:effectRef idx="2">
+            <a:schemeClr val="accent1"/>
+          </a:effectRef>
+          <a:fontRef idx="minor">
+            <a:schemeClr val="lt1"/>
+          </a:fontRef>
+        </p:style>
+        <p:txBody>
+          <a:bodyPr rtlCol="0" anchor="ctr" wrap="square" lIns="109728" rIns="109728"/>
+          <a:lstStyle/>
+          <a:p>
+            <a:pPr algn="ctr"/>
+            <a:r>
+              <a:rPr sz="1400" b="0">
                 <a:solidFill>
                   <a:srgbClr val="19180F"/>
                 </a:solidFill>
                 <a:latin typeface="Calibri"/>
               </a:rPr>
-              <a:t>GPA (outcome); in/out-degree, Katz-Bonacich, betweenness, eigenvector; high school vs. university.</a:t>
-            </a:r>
-          </a:p>
-        </p:txBody>
-      </p:sp>
-      <p:sp>
-        <p:nvSpPr>
-          <p:cNvPr id="12" name="TextBox 11"/>
+              <a:t/>
+            </a:r>
+          </a:p>
+        </p:txBody>
+      </p:sp>
+      <p:sp>
+        <p:nvSpPr>
+          <p:cNvPr id="15" name="TextBox 14"/>
           <p:cNvSpPr txBox="1"/>
           <p:nvPr/>
         </p:nvSpPr>
         <p:spPr>
           <a:xfrm>
-            <a:off x="640080" y="5989320"/>
-            <a:ext cx="4480560" cy="548640"/>
+            <a:off x="8229600" y="3657600"/>
+            <a:ext cx="3136392" cy="365760"/>
           </a:xfrm>
           <a:prstGeom prst="rect">
             <a:avLst/>
@@ -6436,20 +7643,178 @@
               </a:lnSpc>
             </a:pPr>
             <a:r>
-              <a:rPr sz="1250" b="0" i="1">
+              <a:rPr sz="1500" b="1" i="0">
+                <a:solidFill>
+                  <a:srgbClr val="19180F"/>
+                </a:solidFill>
+                <a:latin typeface="Georgia"/>
+              </a:rPr>
+              <a:t>β₁ &lt; 0</a:t>
+            </a:r>
+          </a:p>
+        </p:txBody>
+      </p:sp>
+      <p:sp>
+        <p:nvSpPr>
+          <p:cNvPr id="16" name="TextBox 15"/>
+          <p:cNvSpPr txBox="1"/>
+          <p:nvPr/>
+        </p:nvSpPr>
+        <p:spPr>
+          <a:xfrm>
+            <a:off x="8229600" y="4041648"/>
+            <a:ext cx="3136392" cy="457200"/>
+          </a:xfrm>
+          <a:prstGeom prst="rect">
+            <a:avLst/>
+          </a:prstGeom>
+          <a:noFill/>
+        </p:spPr>
+        <p:txBody>
+          <a:bodyPr wrap="square" anchor="t">
+            <a:spAutoFit/>
+          </a:bodyPr>
+          <a:lstStyle/>
+          <a:p>
+            <a:pPr algn="l">
+              <a:lnSpc>
+                <a:spcPct val="115000"/>
+              </a:lnSpc>
+            </a:pPr>
+            <a:r>
+              <a:rPr sz="1250" b="0" i="0">
                 <a:solidFill>
                   <a:srgbClr val="55503F"/>
                 </a:solidFill>
                 <a:latin typeface="Calibri"/>
               </a:rPr>
-              <a:t>485 students · 3,186 ties, one real snapshot — colour = GPA, size = popularity</a:t>
-            </a:r>
-          </a:p>
-        </p:txBody>
-      </p:sp>
-      <p:sp>
-        <p:nvSpPr>
-          <p:cNvPr id="13" name="TextBox 12"/>
+              <a:t>wide reach eats study time</a:t>
+            </a:r>
+          </a:p>
+        </p:txBody>
+      </p:sp>
+      <p:sp>
+        <p:nvSpPr>
+          <p:cNvPr id="17" name="TextBox 16"/>
+          <p:cNvSpPr txBox="1"/>
+          <p:nvPr/>
+        </p:nvSpPr>
+        <p:spPr>
+          <a:xfrm>
+            <a:off x="685800" y="4754880"/>
+            <a:ext cx="10058400" cy="320040"/>
+          </a:xfrm>
+          <a:prstGeom prst="rect">
+            <a:avLst/>
+          </a:prstGeom>
+          <a:noFill/>
+        </p:spPr>
+        <p:txBody>
+          <a:bodyPr wrap="square" anchor="t">
+            <a:spAutoFit/>
+          </a:bodyPr>
+          <a:lstStyle/>
+          <a:p>
+            <a:pPr algn="l">
+              <a:lnSpc>
+                <a:spcPct val="115000"/>
+              </a:lnSpc>
+            </a:pPr>
+            <a:r>
+              <a:rPr sz="1250" b="1" i="0">
+                <a:solidFill>
+                  <a:srgbClr val="55503F"/>
+                </a:solidFill>
+                <a:latin typeface="Calibri"/>
+              </a:rPr>
+              <a:t>FROM REPLICATING SMIRNOV &amp; THURNER</a:t>
+            </a:r>
+          </a:p>
+        </p:txBody>
+      </p:sp>
+      <p:sp>
+        <p:nvSpPr>
+          <p:cNvPr id="18" name="TextBox 17"/>
+          <p:cNvSpPr txBox="1"/>
+          <p:nvPr/>
+        </p:nvSpPr>
+        <p:spPr>
+          <a:xfrm>
+            <a:off x="822960" y="5120640"/>
+            <a:ext cx="10607040" cy="1554480"/>
+          </a:xfrm>
+          <a:prstGeom prst="rect">
+            <a:avLst/>
+          </a:prstGeom>
+          <a:noFill/>
+        </p:spPr>
+        <p:txBody>
+          <a:bodyPr wrap="square">
+            <a:spAutoFit/>
+          </a:bodyPr>
+          <a:lstStyle/>
+          <a:p>
+            <a:pPr>
+              <a:lnSpc>
+                <a:spcPct val="120000"/>
+              </a:lnSpc>
+              <a:spcAft>
+                <a:spcPts val="600"/>
+              </a:spcAft>
+            </a:pPr>
+            <a:r>
+              <a:rPr sz="1400">
+                <a:solidFill>
+                  <a:srgbClr val="55503F"/>
+                </a:solidFill>
+                <a:latin typeface="Calibri"/>
+              </a:rPr>
+              <a:t>  •  A friend's past GPA won't predict a student's future GPA, once own past GPA is controlled.</a:t>
+            </a:r>
+          </a:p>
+          <a:p>
+            <a:pPr>
+              <a:lnSpc>
+                <a:spcPct val="120000"/>
+              </a:lnSpc>
+              <a:spcAft>
+                <a:spcPts val="600"/>
+              </a:spcAft>
+            </a:pPr>
+            <a:r>
+              <a:rPr sz="1400">
+                <a:solidFill>
+                  <a:srgbClr val="55503F"/>
+                </a:solidFill>
+                <a:latin typeface="Calibri"/>
+              </a:rPr>
+              <a:t>  •  New friendships show a smaller GPA gap than ending ones — a sign of selection.</a:t>
+            </a:r>
+          </a:p>
+          <a:p>
+            <a:pPr>
+              <a:lnSpc>
+                <a:spcPct val="120000"/>
+              </a:lnSpc>
+              <a:spcAft>
+                <a:spcPts val="600"/>
+              </a:spcAft>
+            </a:pPr>
+            <a:r>
+              <a:rPr sz="1400">
+                <a:solidFill>
+                  <a:srgbClr val="55503F"/>
+                </a:solidFill>
+                <a:latin typeface="Calibri"/>
+              </a:rPr>
+              <a:t>  •  Selection is stronger at university than in high school.</a:t>
+            </a:r>
+          </a:p>
+        </p:txBody>
+      </p:sp>
+      <p:sp>
+        <p:nvSpPr>
+          <p:cNvPr id="19" name="TextBox 18"/>
           <p:cNvSpPr txBox="1"/>
           <p:nvPr/>
         </p:nvSpPr>
@@ -6557,7 +7922,7 @@
         <p:spPr>
           <a:xfrm>
             <a:off x="640080" y="365760"/>
-            <a:ext cx="8229600" cy="365760"/>
+            <a:ext cx="10058400" cy="365760"/>
           </a:xfrm>
           <a:prstGeom prst="rect">
             <a:avLst/>
@@ -6582,7 +7947,7 @@
                 </a:solidFill>
                 <a:latin typeface="Calibri"/>
               </a:rPr>
-              <a:t>OUR PLAN</a:t>
+              <a:t>THE DATA</a:t>
             </a:r>
           </a:p>
         </p:txBody>
@@ -6595,8 +7960,8 @@
         </p:nvSpPr>
         <p:spPr>
           <a:xfrm>
-            <a:off x="640080" y="685800"/>
-            <a:ext cx="10881360" cy="914400"/>
+            <a:off x="640080" y="713232"/>
+            <a:ext cx="10972800" cy="914400"/>
           </a:xfrm>
           <a:prstGeom prst="rect">
             <a:avLst/>
@@ -6611,78 +7976,45 @@
           <a:p>
             <a:pPr algn="l">
               <a:lnSpc>
-                <a:spcPct val="115000"/>
-              </a:lnSpc>
-            </a:pPr>
-            <a:r>
-              <a:rPr sz="2800" b="1" i="0">
+                <a:spcPct val="108000"/>
+              </a:lnSpc>
+            </a:pPr>
+            <a:r>
+              <a:rPr sz="2700" b="1" i="0">
                 <a:solidFill>
                   <a:srgbClr val="19180F"/>
                 </a:solidFill>
                 <a:latin typeface="Georgia"/>
               </a:rPr>
-              <a:t>Three layers of analysis</a:t>
-            </a:r>
-          </a:p>
-        </p:txBody>
-      </p:sp>
-      <p:sp>
-        <p:nvSpPr>
-          <p:cNvPr id="5" name="Rounded Rectangle 4"/>
-          <p:cNvSpPr/>
-          <p:nvPr/>
-        </p:nvSpPr>
-        <p:spPr>
-          <a:xfrm>
-            <a:off x="640080" y="2011680"/>
-            <a:ext cx="3200400" cy="1371600"/>
-          </a:xfrm>
-          <a:prstGeom prst="roundRect">
-            <a:avLst>
-              <a:gd name="adj" fmla="val 12000"/>
-            </a:avLst>
-          </a:prstGeom>
-          <a:solidFill>
-            <a:srgbClr val="FFFFFF"/>
-          </a:solidFill>
-          <a:ln w="15875">
-            <a:solidFill>
-              <a:srgbClr val="DDD8CD"/>
-            </a:solidFill>
-          </a:ln>
-          <a:effectLst/>
-        </p:spPr>
-        <p:style>
-          <a:lnRef idx="1">
-            <a:schemeClr val="accent1"/>
-          </a:lnRef>
-          <a:fillRef idx="3">
-            <a:schemeClr val="accent1"/>
-          </a:fillRef>
-          <a:effectRef idx="2">
-            <a:schemeClr val="accent1"/>
-          </a:effectRef>
-          <a:fontRef idx="minor">
-            <a:schemeClr val="lt1"/>
-          </a:fontRef>
-        </p:style>
-        <p:txBody>
-          <a:bodyPr rtlCol="0" anchor="ctr" wrap="square" lIns="109728" rIns="109728"/>
-          <a:lstStyle/>
-          <a:p>
-            <a:pPr algn="ctr"/>
-            <a:r>
-              <a:rPr sz="1400" b="0">
-                <a:solidFill>
-                  <a:srgbClr val="19180F"/>
-                </a:solidFill>
-                <a:latin typeface="Calibri"/>
-              </a:rPr>
-              <a:t/>
-            </a:r>
-          </a:p>
-        </p:txBody>
-      </p:sp>
+              <a:t>A real, directed friendship network — observed over time</a:t>
+            </a:r>
+          </a:p>
+        </p:txBody>
+      </p:sp>
+      <p:pic>
+        <p:nvPicPr>
+          <p:cNvPr id="5" name="Picture 4" descr="real_network_school.png"/>
+          <p:cNvPicPr>
+            <a:picLocks noChangeAspect="1"/>
+          </p:cNvPicPr>
+          <p:nvPr/>
+        </p:nvPicPr>
+        <p:blipFill>
+          <a:blip r:embed="rId2"/>
+          <a:stretch>
+            <a:fillRect/>
+          </a:stretch>
+        </p:blipFill>
+        <p:spPr>
+          <a:xfrm>
+            <a:off x="6126480" y="1554480"/>
+            <a:ext cx="5935164" cy="4480560"/>
+          </a:xfrm>
+          <a:prstGeom prst="rect">
+            <a:avLst/>
+          </a:prstGeom>
+        </p:spPr>
+      </p:pic>
       <p:sp>
         <p:nvSpPr>
           <p:cNvPr id="6" name="TextBox 5"/>
@@ -6691,8 +8023,8 @@
         </p:nvSpPr>
         <p:spPr>
           <a:xfrm>
-            <a:off x="868680" y="2121408"/>
-            <a:ext cx="2743200" cy="274320"/>
+            <a:off x="640080" y="1691640"/>
+            <a:ext cx="5212080" cy="320040"/>
           </a:xfrm>
           <a:prstGeom prst="rect">
             <a:avLst/>
@@ -6713,11 +8045,11 @@
             <a:r>
               <a:rPr sz="1300" b="1" i="0">
                 <a:solidFill>
-                  <a:srgbClr val="EB6834"/>
-                </a:solidFill>
-                <a:latin typeface="Calibri"/>
-              </a:rPr>
-              <a:t>LAYER 1</a:t>
+                  <a:srgbClr val="2A78D6"/>
+                </a:solidFill>
+                <a:latin typeface="Calibri"/>
+              </a:rPr>
+              <a:t>NODES</a:t>
             </a:r>
           </a:p>
         </p:txBody>
@@ -6730,8 +8062,8 @@
         </p:nvSpPr>
         <p:spPr>
           <a:xfrm>
-            <a:off x="868680" y="2395728"/>
-            <a:ext cx="2743200" cy="411480"/>
+            <a:off x="640080" y="2011680"/>
+            <a:ext cx="5212080" cy="822960"/>
           </a:xfrm>
           <a:prstGeom prst="rect">
             <a:avLst/>
@@ -6746,88 +8078,31 @@
           <a:p>
             <a:pPr algn="l">
               <a:lnSpc>
-                <a:spcPct val="115000"/>
-              </a:lnSpc>
-            </a:pPr>
-            <a:r>
-              <a:rPr sz="1900" b="1" i="0">
+                <a:spcPct val="130000"/>
+              </a:lnSpc>
+            </a:pPr>
+            <a:r>
+              <a:rPr sz="1400" b="0" i="0">
                 <a:solidFill>
                   <a:srgbClr val="19180F"/>
                 </a:solidFill>
-                <a:latin typeface="Georgia"/>
-              </a:rPr>
-              <a:t>Replicate</a:t>
-            </a:r>
-          </a:p>
-        </p:txBody>
-      </p:sp>
-      <p:sp>
-        <p:nvSpPr>
-          <p:cNvPr id="8" name="Rounded Rectangle 7"/>
-          <p:cNvSpPr/>
-          <p:nvPr/>
-        </p:nvSpPr>
-        <p:spPr>
-          <a:xfrm>
-            <a:off x="4343400" y="2011680"/>
-            <a:ext cx="3200400" cy="1371600"/>
-          </a:xfrm>
-          <a:prstGeom prst="roundRect">
-            <a:avLst>
-              <a:gd name="adj" fmla="val 12000"/>
-            </a:avLst>
-          </a:prstGeom>
-          <a:solidFill>
-            <a:srgbClr val="FFFFFF"/>
-          </a:solidFill>
-          <a:ln w="15875">
-            <a:solidFill>
-              <a:srgbClr val="DDD8CD"/>
-            </a:solidFill>
-          </a:ln>
-          <a:effectLst/>
-        </p:spPr>
-        <p:style>
-          <a:lnRef idx="1">
-            <a:schemeClr val="accent1"/>
-          </a:lnRef>
-          <a:fillRef idx="3">
-            <a:schemeClr val="accent1"/>
-          </a:fillRef>
-          <a:effectRef idx="2">
-            <a:schemeClr val="accent1"/>
-          </a:effectRef>
-          <a:fontRef idx="minor">
-            <a:schemeClr val="lt1"/>
-          </a:fontRef>
-        </p:style>
-        <p:txBody>
-          <a:bodyPr rtlCol="0" anchor="ctr" wrap="square" lIns="109728" rIns="109728"/>
-          <a:lstStyle/>
-          <a:p>
-            <a:pPr algn="ctr"/>
-            <a:r>
-              <a:rPr sz="1400" b="0">
-                <a:solidFill>
-                  <a:srgbClr val="19180F"/>
-                </a:solidFill>
-                <a:latin typeface="Calibri"/>
-              </a:rPr>
-              <a:t/>
-            </a:r>
-          </a:p>
-        </p:txBody>
-      </p:sp>
-      <p:sp>
-        <p:nvSpPr>
-          <p:cNvPr id="9" name="TextBox 8"/>
+                <a:latin typeface="Calibri"/>
+              </a:rPr>
+              <a:t>Students. 655 in high school; 1,200–1,549 per university year.</a:t>
+            </a:r>
+          </a:p>
+        </p:txBody>
+      </p:sp>
+      <p:sp>
+        <p:nvSpPr>
+          <p:cNvPr id="8" name="TextBox 7"/>
           <p:cNvSpPr txBox="1"/>
           <p:nvPr/>
         </p:nvSpPr>
         <p:spPr>
           <a:xfrm>
-            <a:off x="4572000" y="2121408"/>
-            <a:ext cx="2743200" cy="274320"/>
+            <a:off x="640080" y="2880360"/>
+            <a:ext cx="5212080" cy="320040"/>
           </a:xfrm>
           <a:prstGeom prst="rect">
             <a:avLst/>
@@ -6852,21 +8127,21 @@
                 </a:solidFill>
                 <a:latin typeface="Calibri"/>
               </a:rPr>
-              <a:t>LAYER 2</a:t>
-            </a:r>
-          </a:p>
-        </p:txBody>
-      </p:sp>
-      <p:sp>
-        <p:nvSpPr>
-          <p:cNvPr id="10" name="TextBox 9"/>
+              <a:t>EDGES</a:t>
+            </a:r>
+          </a:p>
+        </p:txBody>
+      </p:sp>
+      <p:sp>
+        <p:nvSpPr>
+          <p:cNvPr id="9" name="TextBox 8"/>
           <p:cNvSpPr txBox="1"/>
           <p:nvPr/>
         </p:nvSpPr>
         <p:spPr>
           <a:xfrm>
-            <a:off x="4572000" y="2395728"/>
-            <a:ext cx="2743200" cy="411480"/>
+            <a:off x="640080" y="3200400"/>
+            <a:ext cx="5212080" cy="1371600"/>
           </a:xfrm>
           <a:prstGeom prst="rect">
             <a:avLst/>
@@ -6881,88 +8156,31 @@
           <a:p>
             <a:pPr algn="l">
               <a:lnSpc>
-                <a:spcPct val="115000"/>
-              </a:lnSpc>
-            </a:pPr>
-            <a:r>
-              <a:rPr sz="1900" b="1" i="0">
+                <a:spcPct val="130000"/>
+              </a:lnSpc>
+            </a:pPr>
+            <a:r>
+              <a:rPr sz="1400" b="0" i="0">
                 <a:solidFill>
                   <a:srgbClr val="19180F"/>
                 </a:solidFill>
-                <a:latin typeface="Georgia"/>
-              </a:rPr>
-              <a:t>Test the model</a:t>
-            </a:r>
-          </a:p>
-        </p:txBody>
-      </p:sp>
-      <p:sp>
-        <p:nvSpPr>
-          <p:cNvPr id="11" name="Rounded Rectangle 10"/>
-          <p:cNvSpPr/>
-          <p:nvPr/>
-        </p:nvSpPr>
-        <p:spPr>
-          <a:xfrm>
-            <a:off x="8046720" y="2011680"/>
-            <a:ext cx="3200400" cy="1371600"/>
-          </a:xfrm>
-          <a:prstGeom prst="roundRect">
-            <a:avLst>
-              <a:gd name="adj" fmla="val 12000"/>
-            </a:avLst>
-          </a:prstGeom>
-          <a:solidFill>
-            <a:srgbClr val="FFFFFF"/>
-          </a:solidFill>
-          <a:ln w="15875">
-            <a:solidFill>
-              <a:srgbClr val="DDD8CD"/>
-            </a:solidFill>
-          </a:ln>
-          <a:effectLst/>
-        </p:spPr>
-        <p:style>
-          <a:lnRef idx="1">
-            <a:schemeClr val="accent1"/>
-          </a:lnRef>
-          <a:fillRef idx="3">
-            <a:schemeClr val="accent1"/>
-          </a:fillRef>
-          <a:effectRef idx="2">
-            <a:schemeClr val="accent1"/>
-          </a:effectRef>
-          <a:fontRef idx="minor">
-            <a:schemeClr val="lt1"/>
-          </a:fontRef>
-        </p:style>
-        <p:txBody>
-          <a:bodyPr rtlCol="0" anchor="ctr" wrap="square" lIns="109728" rIns="109728"/>
-          <a:lstStyle/>
-          <a:p>
-            <a:pPr algn="ctr"/>
-            <a:r>
-              <a:rPr sz="1400" b="0">
-                <a:solidFill>
-                  <a:srgbClr val="19180F"/>
-                </a:solidFill>
-                <a:latin typeface="Calibri"/>
-              </a:rPr>
-              <a:t/>
-            </a:r>
-          </a:p>
-        </p:txBody>
-      </p:sp>
-      <p:sp>
-        <p:nvSpPr>
-          <p:cNvPr id="12" name="TextBox 11"/>
+                <a:latin typeface="Calibri"/>
+              </a:rPr>
+              <a:t>Directed “like” ties. i → j means i liked j at least once in a 3-month window. 2–14 snapshots per group, 38 in total. Only 24–27% are mutual.</a:t>
+            </a:r>
+          </a:p>
+        </p:txBody>
+      </p:sp>
+      <p:sp>
+        <p:nvSpPr>
+          <p:cNvPr id="10" name="TextBox 9"/>
           <p:cNvSpPr txBox="1"/>
           <p:nvPr/>
         </p:nvSpPr>
         <p:spPr>
           <a:xfrm>
-            <a:off x="8275320" y="2121408"/>
-            <a:ext cx="2743200" cy="274320"/>
+            <a:off x="640080" y="4709160"/>
+            <a:ext cx="5212080" cy="320040"/>
           </a:xfrm>
           <a:prstGeom prst="rect">
             <a:avLst/>
@@ -6983,25 +8201,25 @@
             <a:r>
               <a:rPr sz="1300" b="1" i="0">
                 <a:solidFill>
-                  <a:srgbClr val="EB6834"/>
-                </a:solidFill>
-                <a:latin typeface="Calibri"/>
-              </a:rPr>
-              <a:t>LAYER 3</a:t>
-            </a:r>
-          </a:p>
-        </p:txBody>
-      </p:sp>
-      <p:sp>
-        <p:nvSpPr>
-          <p:cNvPr id="13" name="TextBox 12"/>
+                  <a:srgbClr val="19180F"/>
+                </a:solidFill>
+                <a:latin typeface="Calibri"/>
+              </a:rPr>
+              <a:t>ATTRIBUTES</a:t>
+            </a:r>
+          </a:p>
+        </p:txBody>
+      </p:sp>
+      <p:sp>
+        <p:nvSpPr>
+          <p:cNvPr id="11" name="TextBox 10"/>
           <p:cNvSpPr txBox="1"/>
           <p:nvPr/>
         </p:nvSpPr>
         <p:spPr>
           <a:xfrm>
-            <a:off x="8275320" y="2395728"/>
-            <a:ext cx="2743200" cy="411480"/>
+            <a:off x="640080" y="5029200"/>
+            <a:ext cx="5212080" cy="1097280"/>
           </a:xfrm>
           <a:prstGeom prst="rect">
             <a:avLst/>
@@ -7016,355 +8234,31 @@
           <a:p>
             <a:pPr algn="l">
               <a:lnSpc>
-                <a:spcPct val="115000"/>
-              </a:lnSpc>
-            </a:pPr>
-            <a:r>
-              <a:rPr sz="1900" b="1" i="0">
+                <a:spcPct val="130000"/>
+              </a:lnSpc>
+            </a:pPr>
+            <a:r>
+              <a:rPr sz="1400" b="0" i="0">
                 <a:solidFill>
                   <a:srgbClr val="19180F"/>
                 </a:solidFill>
-                <a:latin typeface="Georgia"/>
-              </a:rPr>
-              <a:t>Compare</a:t>
-            </a:r>
-          </a:p>
-        </p:txBody>
-      </p:sp>
-      <p:cxnSp>
-        <p:nvCxnSpPr>
-          <p:cNvPr id="14" name="Connector 13"/>
-          <p:cNvCxnSpPr/>
-          <p:nvPr/>
-        </p:nvCxnSpPr>
-        <p:spPr>
-          <a:xfrm>
-            <a:off x="3840480" y="2697480.0"/>
-            <a:ext cx="502920" cy="0.0"/>
-          </a:xfrm>
-          <a:prstGeom prst="line">
-            <a:avLst/>
-          </a:prstGeom>
-          <a:ln w="25400">
-            <a:solidFill>
-              <a:srgbClr val="55503F"/>
-            </a:solidFill>
-            <a:tailEnd type="triangle" w="med" len="med"/>
-          </a:ln>
-        </p:spPr>
-        <p:style>
-          <a:lnRef idx="2">
-            <a:schemeClr val="accent1"/>
-          </a:lnRef>
-          <a:fillRef idx="0">
-            <a:schemeClr val="accent1"/>
-          </a:fillRef>
-          <a:effectRef idx="1">
-            <a:schemeClr val="accent1"/>
-          </a:effectRef>
-          <a:fontRef idx="minor">
-            <a:schemeClr val="tx1"/>
-          </a:fontRef>
-        </p:style>
-      </p:cxnSp>
-      <p:cxnSp>
-        <p:nvCxnSpPr>
-          <p:cNvPr id="15" name="Connector 14"/>
-          <p:cNvCxnSpPr/>
-          <p:nvPr/>
-        </p:nvCxnSpPr>
-        <p:spPr>
-          <a:xfrm>
-            <a:off x="7543800" y="2697480.0"/>
-            <a:ext cx="502920" cy="0.0"/>
-          </a:xfrm>
-          <a:prstGeom prst="line">
-            <a:avLst/>
-          </a:prstGeom>
-          <a:ln w="25400">
-            <a:solidFill>
-              <a:srgbClr val="55503F"/>
-            </a:solidFill>
-            <a:tailEnd type="triangle" w="med" len="med"/>
-          </a:ln>
-        </p:spPr>
-        <p:style>
-          <a:lnRef idx="2">
-            <a:schemeClr val="accent1"/>
-          </a:lnRef>
-          <a:fillRef idx="0">
-            <a:schemeClr val="accent1"/>
-          </a:fillRef>
-          <a:effectRef idx="1">
-            <a:schemeClr val="accent1"/>
-          </a:effectRef>
-          <a:fontRef idx="minor">
-            <a:schemeClr val="tx1"/>
-          </a:fontRef>
-        </p:style>
-      </p:cxnSp>
-      <p:sp>
-        <p:nvSpPr>
-          <p:cNvPr id="16" name="TextBox 15"/>
-          <p:cNvSpPr txBox="1"/>
-          <p:nvPr/>
-        </p:nvSpPr>
-        <p:spPr>
-          <a:xfrm>
-            <a:off x="640080" y="3703320"/>
-            <a:ext cx="3200400" cy="1463040"/>
-          </a:xfrm>
-          <a:prstGeom prst="rect">
-            <a:avLst/>
-          </a:prstGeom>
-          <a:noFill/>
-        </p:spPr>
-        <p:txBody>
-          <a:bodyPr wrap="square" anchor="t">
-            <a:spAutoFit/>
-          </a:bodyPr>
-          <a:lstStyle/>
-          <a:p>
-            <a:pPr algn="l">
-              <a:lnSpc>
-                <a:spcPct val="130000"/>
-              </a:lnSpc>
-            </a:pPr>
-            <a:r>
-              <a:rPr sz="1400" b="0" i="0">
-                <a:solidFill>
-                  <a:srgbClr val="55503F"/>
-                </a:solidFill>
-                <a:latin typeface="Calibri"/>
-              </a:rPr>
-              <a:t>Rebuild Smirnov &amp; Thurner's</a:t>
-            </a:r>
-          </a:p>
-          <a:p>
-            <a:pPr algn="l">
-              <a:lnSpc>
-                <a:spcPct val="130000"/>
-              </a:lnSpc>
-            </a:pPr>
-            <a:r>
-              <a:rPr sz="1400" b="0" i="0">
-                <a:solidFill>
-                  <a:srgbClr val="55503F"/>
-                </a:solidFill>
-                <a:latin typeface="Calibri"/>
-              </a:rPr>
-              <a:t>selection-vs-influence checks</a:t>
-            </a:r>
-          </a:p>
-          <a:p>
-            <a:pPr algn="l">
-              <a:lnSpc>
-                <a:spcPct val="130000"/>
-              </a:lnSpc>
-            </a:pPr>
-            <a:r>
-              <a:rPr sz="1400" b="0" i="0">
-                <a:solidFill>
-                  <a:srgbClr val="55503F"/>
-                </a:solidFill>
-                <a:latin typeface="Calibri"/>
-              </a:rPr>
-              <a:t>on the same data</a:t>
-            </a:r>
-          </a:p>
-        </p:txBody>
-      </p:sp>
-      <p:sp>
-        <p:nvSpPr>
-          <p:cNvPr id="17" name="TextBox 16"/>
-          <p:cNvSpPr txBox="1"/>
-          <p:nvPr/>
-        </p:nvSpPr>
-        <p:spPr>
-          <a:xfrm>
-            <a:off x="4343400" y="3703320"/>
-            <a:ext cx="3200400" cy="1463040"/>
-          </a:xfrm>
-          <a:prstGeom prst="rect">
-            <a:avLst/>
-          </a:prstGeom>
-          <a:noFill/>
-        </p:spPr>
-        <p:txBody>
-          <a:bodyPr wrap="square" anchor="t">
-            <a:spAutoFit/>
-          </a:bodyPr>
-          <a:lstStyle/>
-          <a:p>
-            <a:pPr algn="l">
-              <a:lnSpc>
-                <a:spcPct val="130000"/>
-              </a:lnSpc>
-            </a:pPr>
-            <a:r>
-              <a:rPr sz="1400" b="0" i="0">
-                <a:solidFill>
-                  <a:srgbClr val="55503F"/>
-                </a:solidFill>
-                <a:latin typeface="Calibri"/>
-              </a:rPr>
-              <a:t>Compute Katz-Bonacich</a:t>
-            </a:r>
-          </a:p>
-          <a:p>
-            <a:pPr algn="l">
-              <a:lnSpc>
-                <a:spcPct val="130000"/>
-              </a:lnSpc>
-            </a:pPr>
-            <a:r>
-              <a:rPr sz="1400" b="0" i="0">
-                <a:solidFill>
-                  <a:srgbClr val="55503F"/>
-                </a:solidFill>
-                <a:latin typeface="Calibri"/>
-              </a:rPr>
-              <a:t>centrality; test the theory's</a:t>
-            </a:r>
-          </a:p>
-          <a:p>
-            <a:pPr algn="l">
-              <a:lnSpc>
-                <a:spcPct val="130000"/>
-              </a:lnSpc>
-            </a:pPr>
-            <a:r>
-              <a:rPr sz="1400" b="0" i="0">
-                <a:solidFill>
-                  <a:srgbClr val="55503F"/>
-                </a:solidFill>
-                <a:latin typeface="Calibri"/>
-              </a:rPr>
-              <a:t>prediction against the data</a:t>
-            </a:r>
-          </a:p>
-        </p:txBody>
-      </p:sp>
-      <p:sp>
-        <p:nvSpPr>
-          <p:cNvPr id="18" name="TextBox 17"/>
-          <p:cNvSpPr txBox="1"/>
-          <p:nvPr/>
-        </p:nvSpPr>
-        <p:spPr>
-          <a:xfrm>
-            <a:off x="8046720" y="3703320"/>
-            <a:ext cx="3200400" cy="1463040"/>
-          </a:xfrm>
-          <a:prstGeom prst="rect">
-            <a:avLst/>
-          </a:prstGeom>
-          <a:noFill/>
-        </p:spPr>
-        <p:txBody>
-          <a:bodyPr wrap="square" anchor="t">
-            <a:spAutoFit/>
-          </a:bodyPr>
-          <a:lstStyle/>
-          <a:p>
-            <a:pPr algn="l">
-              <a:lnSpc>
-                <a:spcPct val="130000"/>
-              </a:lnSpc>
-            </a:pPr>
-            <a:r>
-              <a:rPr sz="1400" b="0" i="0">
-                <a:solidFill>
-                  <a:srgbClr val="55503F"/>
-                </a:solidFill>
-                <a:latin typeface="Calibri"/>
-              </a:rPr>
-              <a:t>Split high school vs.</a:t>
-            </a:r>
-          </a:p>
-          <a:p>
-            <a:pPr algn="l">
-              <a:lnSpc>
-                <a:spcPct val="130000"/>
-              </a:lnSpc>
-            </a:pPr>
-            <a:r>
-              <a:rPr sz="1400" b="0" i="0">
-                <a:solidFill>
-                  <a:srgbClr val="55503F"/>
-                </a:solidFill>
-                <a:latin typeface="Calibri"/>
-              </a:rPr>
-              <a:t>university; test whether the</a:t>
-            </a:r>
-          </a:p>
-          <a:p>
-            <a:pPr algn="l">
-              <a:lnSpc>
-                <a:spcPct val="130000"/>
-              </a:lnSpc>
-            </a:pPr>
-            <a:r>
-              <a:rPr sz="1400" b="0" i="0">
-                <a:solidFill>
-                  <a:srgbClr val="55503F"/>
-                </a:solidFill>
-                <a:latin typeface="Calibri"/>
-              </a:rPr>
-              <a:t>effect holds across settings</a:t>
-            </a:r>
-          </a:p>
-        </p:txBody>
-      </p:sp>
-      <p:sp>
-        <p:nvSpPr>
-          <p:cNvPr id="19" name="TextBox 18"/>
-          <p:cNvSpPr txBox="1"/>
-          <p:nvPr/>
-        </p:nvSpPr>
-        <p:spPr>
-          <a:xfrm>
-            <a:off x="640080" y="5212080"/>
-            <a:ext cx="10515600" cy="640080"/>
-          </a:xfrm>
-          <a:prstGeom prst="rect">
-            <a:avLst/>
-          </a:prstGeom>
-          <a:noFill/>
-        </p:spPr>
-        <p:txBody>
-          <a:bodyPr wrap="square" anchor="t">
-            <a:spAutoFit/>
-          </a:bodyPr>
-          <a:lstStyle/>
-          <a:p>
-            <a:pPr algn="l">
-              <a:lnSpc>
-                <a:spcPct val="115000"/>
-              </a:lnSpc>
-            </a:pPr>
-            <a:r>
-              <a:rPr sz="1500" b="0" i="1">
-                <a:solidFill>
-                  <a:srgbClr val="55503F"/>
-                </a:solidFill>
-                <a:latin typeface="Calibri"/>
-              </a:rPr>
-              <a:t>Deliberately conservative: we pre-register our main test before exploring further, so later robustness checks can't be accused of cherry-picking.</a:t>
-            </a:r>
-          </a:p>
-        </p:txBody>
-      </p:sp>
-      <p:sp>
-        <p:nvSpPr>
-          <p:cNvPr id="20" name="Rounded Rectangle 19"/>
+                <a:latin typeface="Calibri"/>
+              </a:rPr>
+              <a:t>GPA; in/out-degree, Katz-Bonacich, betweenness, eigenvector; school vs. university.</a:t>
+            </a:r>
+          </a:p>
+        </p:txBody>
+      </p:sp>
+      <p:sp>
+        <p:nvSpPr>
+          <p:cNvPr id="12" name="Rounded Rectangle 11"/>
           <p:cNvSpPr/>
           <p:nvPr/>
         </p:nvSpPr>
         <p:spPr>
           <a:xfrm>
             <a:off x="640080" y="5989320"/>
-            <a:ext cx="10515600" cy="502920"/>
+            <a:ext cx="10881360" cy="548640"/>
           </a:xfrm>
           <a:prstGeom prst="roundRect">
             <a:avLst>
@@ -7401,59 +8295,20 @@
           <a:p>
             <a:pPr algn="ctr"/>
             <a:r>
-              <a:rPr sz="1400" b="0">
+              <a:rPr sz="1350" b="0">
                 <a:solidFill>
                   <a:srgbClr val="19180F"/>
                 </a:solidFill>
                 <a:latin typeface="Calibri"/>
               </a:rPr>
-              <a:t/>
-            </a:r>
-          </a:p>
-        </p:txBody>
-      </p:sp>
-      <p:sp>
-        <p:nvSpPr>
-          <p:cNvPr id="21" name="TextBox 20"/>
-          <p:cNvSpPr txBox="1"/>
-          <p:nvPr/>
-        </p:nvSpPr>
-        <p:spPr>
-          <a:xfrm>
-            <a:off x="868680" y="6053328"/>
-            <a:ext cx="10058400" cy="365760"/>
-          </a:xfrm>
-          <a:prstGeom prst="rect">
-            <a:avLst/>
-          </a:prstGeom>
-          <a:noFill/>
-        </p:spPr>
-        <p:txBody>
-          <a:bodyPr wrap="square" anchor="t">
-            <a:spAutoFit/>
-          </a:bodyPr>
-          <a:lstStyle/>
-          <a:p>
-            <a:pPr algn="l">
-              <a:lnSpc>
-                <a:spcPct val="115000"/>
-              </a:lnSpc>
-            </a:pPr>
-            <a:r>
-              <a:rPr sz="1250" b="0" i="1">
-                <a:solidFill>
-                  <a:srgbClr val="55503F"/>
-                </a:solidFill>
-                <a:latin typeface="Calibri"/>
-              </a:rPr>
-              <a:t>Also grounded in: AddHealth peer effects (IZA DP 3859) · Giulietti, Vlassopoulos &amp; Zenou (2020) on peer depression</a:t>
-            </a:r>
-          </a:p>
-        </p:txBody>
-      </p:sp>
-      <p:sp>
-        <p:nvSpPr>
-          <p:cNvPr id="22" name="TextBox 21"/>
+              <a:t>Same dataset as Smirnov &amp; Thurner — our results compare directly with theirs.</a:t>
+            </a:r>
+          </a:p>
+        </p:txBody>
+      </p:sp>
+      <p:sp>
+        <p:nvSpPr>
+          <p:cNvPr id="13" name="TextBox 12"/>
           <p:cNvSpPr txBox="1"/>
           <p:nvPr/>
         </p:nvSpPr>
@@ -7560,8 +8415,8 @@
         </p:nvSpPr>
         <p:spPr>
           <a:xfrm>
-            <a:off x="822960" y="2651760"/>
-            <a:ext cx="10058400" cy="1097280"/>
+            <a:off x="640080" y="365760"/>
+            <a:ext cx="10058400" cy="365760"/>
           </a:xfrm>
           <a:prstGeom prst="rect">
             <a:avLst/>
@@ -7580,13 +8435,13 @@
               </a:lnSpc>
             </a:pPr>
             <a:r>
-              <a:rPr sz="4400" b="1" i="0">
-                <a:solidFill>
-                  <a:srgbClr val="19180F"/>
-                </a:solidFill>
-                <a:latin typeface="Georgia"/>
-              </a:rPr>
-              <a:t>Questions?</a:t>
+              <a:rPr sz="1300" b="1" i="0">
+                <a:solidFill>
+                  <a:srgbClr val="EB6834"/>
+                </a:solidFill>
+                <a:latin typeface="Calibri"/>
+              </a:rPr>
+              <a:t>HOW WE'LL GO ABOUT IT</a:t>
             </a:r>
           </a:p>
         </p:txBody>
@@ -7599,8 +8454,8 @@
         </p:nvSpPr>
         <p:spPr>
           <a:xfrm>
-            <a:off x="822960" y="3749039"/>
-            <a:ext cx="9144000" cy="548640"/>
+            <a:off x="640080" y="713232"/>
+            <a:ext cx="10972800" cy="914400"/>
           </a:xfrm>
           <a:prstGeom prst="rect">
             <a:avLst/>
@@ -7615,31 +8470,112 @@
           <a:p>
             <a:pPr algn="l">
               <a:lnSpc>
-                <a:spcPct val="115000"/>
-              </a:lnSpc>
-            </a:pPr>
-            <a:r>
-              <a:rPr sz="1500" b="0" i="0">
-                <a:solidFill>
-                  <a:srgbClr val="55503F"/>
-                </a:solidFill>
-                <a:latin typeface="Calibri"/>
-              </a:rPr>
-              <a:t>Data: Smirnov &amp; Thurner (2017), Harvard Dataverse doi:10.7910/DVN/SZA9YW</a:t>
-            </a:r>
-          </a:p>
-        </p:txBody>
-      </p:sp>
-      <p:sp>
-        <p:nvSpPr>
-          <p:cNvPr id="5" name="TextBox 4"/>
+                <a:spcPct val="108000"/>
+              </a:lnSpc>
+            </a:pPr>
+            <a:r>
+              <a:rPr sz="2700" b="1" i="0">
+                <a:solidFill>
+                  <a:srgbClr val="19180F"/>
+                </a:solidFill>
+                <a:latin typeface="Georgia"/>
+              </a:rPr>
+              <a:t>Predict next-term GPA from position — holding the rest fixed</a:t>
+            </a:r>
+          </a:p>
+        </p:txBody>
+      </p:sp>
+      <p:sp>
+        <p:nvSpPr>
+          <p:cNvPr id="5" name="Rounded Rectangle 4"/>
+          <p:cNvSpPr/>
+          <p:nvPr/>
+        </p:nvSpPr>
+        <p:spPr>
+          <a:xfrm>
+            <a:off x="640080" y="1645920"/>
+            <a:ext cx="10927080" cy="1737360"/>
+          </a:xfrm>
+          <a:prstGeom prst="roundRect">
+            <a:avLst>
+              <a:gd name="adj" fmla="val 12000"/>
+            </a:avLst>
+          </a:prstGeom>
+          <a:solidFill>
+            <a:srgbClr val="F1EFE8"/>
+          </a:solidFill>
+          <a:ln w="15875">
+            <a:solidFill>
+              <a:srgbClr val="DDD8CD"/>
+            </a:solidFill>
+          </a:ln>
+          <a:effectLst/>
+        </p:spPr>
+        <p:style>
+          <a:lnRef idx="1">
+            <a:schemeClr val="accent1"/>
+          </a:lnRef>
+          <a:fillRef idx="3">
+            <a:schemeClr val="accent1"/>
+          </a:fillRef>
+          <a:effectRef idx="2">
+            <a:schemeClr val="accent1"/>
+          </a:effectRef>
+          <a:fontRef idx="minor">
+            <a:schemeClr val="lt1"/>
+          </a:fontRef>
+        </p:style>
+        <p:txBody>
+          <a:bodyPr rtlCol="0" anchor="ctr" wrap="square" lIns="109728" rIns="109728"/>
+          <a:lstStyle/>
+          <a:p>
+            <a:pPr algn="ctr"/>
+            <a:r>
+              <a:rPr sz="1400" b="0">
+                <a:solidFill>
+                  <a:srgbClr val="19180F"/>
+                </a:solidFill>
+                <a:latin typeface="Calibri"/>
+              </a:rPr>
+              <a:t/>
+            </a:r>
+          </a:p>
+        </p:txBody>
+      </p:sp>
+      <p:pic>
+        <p:nvPicPr>
+          <p:cNvPr id="6" name="Picture 5" descr="eq_regression.png"/>
+          <p:cNvPicPr>
+            <a:picLocks noChangeAspect="1"/>
+          </p:cNvPicPr>
+          <p:nvPr/>
+        </p:nvPicPr>
+        <p:blipFill>
+          <a:blip r:embed="rId2"/>
+          <a:stretch>
+            <a:fillRect/>
+          </a:stretch>
+        </p:blipFill>
+        <p:spPr>
+          <a:xfrm>
+            <a:off x="1066647" y="1874519"/>
+            <a:ext cx="10058400" cy="1536700"/>
+          </a:xfrm>
+          <a:prstGeom prst="rect">
+            <a:avLst/>
+          </a:prstGeom>
+        </p:spPr>
+      </p:pic>
+      <p:sp>
+        <p:nvSpPr>
+          <p:cNvPr id="7" name="TextBox 6"/>
           <p:cNvSpPr txBox="1"/>
           <p:nvPr/>
         </p:nvSpPr>
         <p:spPr>
           <a:xfrm>
-            <a:off x="822960" y="4206240"/>
-            <a:ext cx="9144000" cy="548640"/>
+            <a:off x="822960" y="3703320"/>
+            <a:ext cx="10515600" cy="411480"/>
           </a:xfrm>
           <a:prstGeom prst="rect">
             <a:avLst/>
@@ -7658,20 +8594,120 @@
               </a:lnSpc>
             </a:pPr>
             <a:r>
-              <a:rPr sz="1500" b="0" i="0">
+              <a:rPr sz="1700" b="1" i="0">
+                <a:solidFill>
+                  <a:srgbClr val="19180F"/>
+                </a:solidFill>
+                <a:latin typeface="Calibri"/>
+              </a:rPr>
+              <a:t>Each control has a job:</a:t>
+            </a:r>
+          </a:p>
+        </p:txBody>
+      </p:sp>
+      <p:sp>
+        <p:nvSpPr>
+          <p:cNvPr id="8" name="TextBox 7"/>
+          <p:cNvSpPr txBox="1"/>
+          <p:nvPr/>
+        </p:nvSpPr>
+        <p:spPr>
+          <a:xfrm>
+            <a:off x="1005840" y="4206240"/>
+            <a:ext cx="10424160" cy="1463040"/>
+          </a:xfrm>
+          <a:prstGeom prst="rect">
+            <a:avLst/>
+          </a:prstGeom>
+          <a:noFill/>
+        </p:spPr>
+        <p:txBody>
+          <a:bodyPr wrap="square">
+            <a:spAutoFit/>
+          </a:bodyPr>
+          <a:lstStyle/>
+          <a:p>
+            <a:pPr>
+              <a:lnSpc>
+                <a:spcPct val="120000"/>
+              </a:lnSpc>
+              <a:spcAft>
+                <a:spcPts val="1000"/>
+              </a:spcAft>
+            </a:pPr>
+            <a:r>
+              <a:rPr sz="1500">
                 <a:solidFill>
                   <a:srgbClr val="55503F"/>
                 </a:solidFill>
                 <a:latin typeface="Calibri"/>
               </a:rPr>
-              <a:t>Model: Calvó-Armengol, Patacchini &amp; Zenou (2009), Review of Economic Studies</a:t>
-            </a:r>
-          </a:p>
-        </p:txBody>
-      </p:sp>
-      <p:sp>
-        <p:nvSpPr>
-          <p:cNvPr id="6" name="TextBox 5"/>
+              <a:t>  •  β₃  average friend GPA  →  β₁ is net of friend-group composition (Smirnov &amp; Thurner's own variable)</a:t>
+            </a:r>
+          </a:p>
+          <a:p>
+            <a:pPr>
+              <a:lnSpc>
+                <a:spcPct val="120000"/>
+              </a:lnSpc>
+              <a:spcAft>
+                <a:spcPts val="1000"/>
+              </a:spcAft>
+            </a:pPr>
+            <a:r>
+              <a:rPr sz="1500">
+                <a:solidFill>
+                  <a:srgbClr val="55503F"/>
+                </a:solidFill>
+                <a:latin typeface="Calibri"/>
+              </a:rPr>
+              <a:t>  •  β₄, β₅  raw in / out-degree  →  β₁ is net of popularity</a:t>
+            </a:r>
+          </a:p>
+        </p:txBody>
+      </p:sp>
+      <p:sp>
+        <p:nvSpPr>
+          <p:cNvPr id="9" name="TextBox 8"/>
+          <p:cNvSpPr txBox="1"/>
+          <p:nvPr/>
+        </p:nvSpPr>
+        <p:spPr>
+          <a:xfrm>
+            <a:off x="822960" y="5532120"/>
+            <a:ext cx="10515600" cy="731520"/>
+          </a:xfrm>
+          <a:prstGeom prst="rect">
+            <a:avLst/>
+          </a:prstGeom>
+          <a:noFill/>
+        </p:spPr>
+        <p:txBody>
+          <a:bodyPr wrap="square" anchor="t">
+            <a:spAutoFit/>
+          </a:bodyPr>
+          <a:lstStyle/>
+          <a:p>
+            <a:pPr algn="l">
+              <a:lnSpc>
+                <a:spcPct val="115000"/>
+              </a:lnSpc>
+            </a:pPr>
+            <a:r>
+              <a:rPr sz="1700" b="1" i="0">
+                <a:solidFill>
+                  <a:srgbClr val="EB6834"/>
+                </a:solidFill>
+                <a:latin typeface="Calibri"/>
+              </a:rPr>
+              <a:t>The real question: does centrality carry anything beyond simply counting friends?</a:t>
+            </a:r>
+          </a:p>
+        </p:txBody>
+      </p:sp>
+      <p:sp>
+        <p:nvSpPr>
+          <p:cNvPr id="10" name="TextBox 9"/>
           <p:cNvSpPr txBox="1"/>
           <p:nvPr/>
         </p:nvSpPr>

--- a/slides/Presentation1.pptx
+++ b/slides/Presentation1.pptx
@@ -3143,30 +3143,63 @@
           </a:p>
         </p:txBody>
       </p:sp>
-      <p:pic>
-        <p:nvPicPr>
-          <p:cNvPr id="3" name="Picture 2" descr="decor_network.png"/>
-          <p:cNvPicPr>
-            <a:picLocks noChangeAspect="1"/>
-          </p:cNvPicPr>
-          <p:nvPr/>
-        </p:nvPicPr>
-        <p:blipFill>
-          <a:blip r:embed="rId2"/>
-          <a:stretch>
-            <a:fillRect/>
-          </a:stretch>
-        </p:blipFill>
-        <p:spPr>
-          <a:xfrm>
-            <a:off x="8275320" y="320040"/>
-            <a:ext cx="3657600" cy="3657600"/>
-          </a:xfrm>
-          <a:prstGeom prst="rect">
-            <a:avLst/>
-          </a:prstGeom>
-        </p:spPr>
-      </p:pic>
+      <p:sp>
+        <p:nvSpPr>
+          <p:cNvPr id="3" name="Rounded Rectangle 2"/>
+          <p:cNvSpPr/>
+          <p:nvPr/>
+        </p:nvSpPr>
+        <p:spPr>
+          <a:xfrm>
+            <a:off x="822960" y="2514600"/>
+            <a:ext cx="502920" cy="1554480"/>
+          </a:xfrm>
+          <a:prstGeom prst="roundRect">
+            <a:avLst>
+              <a:gd name="adj" fmla="val 12000"/>
+            </a:avLst>
+          </a:prstGeom>
+          <a:solidFill>
+            <a:srgbClr val="EB6834"/>
+          </a:solidFill>
+          <a:ln w="15875">
+            <a:solidFill>
+              <a:srgbClr val="EB6834"/>
+            </a:solidFill>
+          </a:ln>
+          <a:effectLst/>
+        </p:spPr>
+        <p:style>
+          <a:lnRef idx="1">
+            <a:schemeClr val="accent1"/>
+          </a:lnRef>
+          <a:fillRef idx="3">
+            <a:schemeClr val="accent1"/>
+          </a:fillRef>
+          <a:effectRef idx="2">
+            <a:schemeClr val="accent1"/>
+          </a:effectRef>
+          <a:fontRef idx="minor">
+            <a:schemeClr val="lt1"/>
+          </a:fontRef>
+        </p:style>
+        <p:txBody>
+          <a:bodyPr rtlCol="0" anchor="ctr" wrap="square" lIns="109728" rIns="109728"/>
+          <a:lstStyle/>
+          <a:p>
+            <a:pPr algn="ctr"/>
+            <a:r>
+              <a:rPr sz="1400" b="0">
+                <a:solidFill>
+                  <a:srgbClr val="19180F"/>
+                </a:solidFill>
+                <a:latin typeface="Calibri"/>
+              </a:rPr>
+              <a:t/>
+            </a:r>
+          </a:p>
+        </p:txBody>
+      </p:sp>
       <p:sp>
         <p:nvSpPr>
           <p:cNvPr id="4" name="TextBox 3"/>
@@ -3175,8 +3208,8 @@
         </p:nvSpPr>
         <p:spPr>
           <a:xfrm>
-            <a:off x="822960" y="1874519"/>
-            <a:ext cx="10515600" cy="457200"/>
+            <a:off x="1600200" y="1965960"/>
+            <a:ext cx="10058400" cy="457200"/>
           </a:xfrm>
           <a:prstGeom prst="rect">
             <a:avLst/>
@@ -3214,8 +3247,8 @@
         </p:nvSpPr>
         <p:spPr>
           <a:xfrm>
-            <a:off x="822960" y="2423160"/>
-            <a:ext cx="10515600" cy="1737360"/>
+            <a:off x="1600200" y="2514600"/>
+            <a:ext cx="10058400" cy="1737360"/>
           </a:xfrm>
           <a:prstGeom prst="rect">
             <a:avLst/>
@@ -3269,8 +3302,8 @@
         </p:nvSpPr>
         <p:spPr>
           <a:xfrm>
-            <a:off x="822960" y="4343400"/>
-            <a:ext cx="10424160" cy="914400"/>
+            <a:off x="1600200" y="4434840"/>
+            <a:ext cx="9692640" cy="914400"/>
           </a:xfrm>
           <a:prstGeom prst="rect">
             <a:avLst/>
@@ -3324,7 +3357,7 @@
         </p:nvSpPr>
         <p:spPr>
           <a:xfrm>
-            <a:off x="822960" y="5989320"/>
+            <a:off x="1600200" y="5989320"/>
             <a:ext cx="8229600" cy="457200"/>
           </a:xfrm>
           <a:prstGeom prst="rect">

--- a/slides/Presentation1.pptx
+++ b/slides/Presentation1.pptx
@@ -3143,63 +3143,30 @@
           </a:p>
         </p:txBody>
       </p:sp>
-      <p:sp>
-        <p:nvSpPr>
-          <p:cNvPr id="3" name="Rounded Rectangle 2"/>
-          <p:cNvSpPr/>
-          <p:nvPr/>
-        </p:nvSpPr>
-        <p:spPr>
-          <a:xfrm>
-            <a:off x="822960" y="2514600"/>
-            <a:ext cx="502920" cy="1554480"/>
-          </a:xfrm>
-          <a:prstGeom prst="roundRect">
-            <a:avLst>
-              <a:gd name="adj" fmla="val 12000"/>
-            </a:avLst>
-          </a:prstGeom>
-          <a:solidFill>
-            <a:srgbClr val="EB6834"/>
-          </a:solidFill>
-          <a:ln w="15875">
-            <a:solidFill>
-              <a:srgbClr val="EB6834"/>
-            </a:solidFill>
-          </a:ln>
-          <a:effectLst/>
-        </p:spPr>
-        <p:style>
-          <a:lnRef idx="1">
-            <a:schemeClr val="accent1"/>
-          </a:lnRef>
-          <a:fillRef idx="3">
-            <a:schemeClr val="accent1"/>
-          </a:fillRef>
-          <a:effectRef idx="2">
-            <a:schemeClr val="accent1"/>
-          </a:effectRef>
-          <a:fontRef idx="minor">
-            <a:schemeClr val="lt1"/>
-          </a:fontRef>
-        </p:style>
-        <p:txBody>
-          <a:bodyPr rtlCol="0" anchor="ctr" wrap="square" lIns="109728" rIns="109728"/>
-          <a:lstStyle/>
-          <a:p>
-            <a:pPr algn="ctr"/>
-            <a:r>
-              <a:rPr sz="1400" b="0">
-                <a:solidFill>
-                  <a:srgbClr val="19180F"/>
-                </a:solidFill>
-                <a:latin typeface="Calibri"/>
-              </a:rPr>
-              <a:t/>
-            </a:r>
-          </a:p>
-        </p:txBody>
-      </p:sp>
+      <p:pic>
+        <p:nvPicPr>
+          <p:cNvPr id="3" name="Picture 2" descr="decor_network.png"/>
+          <p:cNvPicPr>
+            <a:picLocks noChangeAspect="1"/>
+          </p:cNvPicPr>
+          <p:nvPr/>
+        </p:nvPicPr>
+        <p:blipFill>
+          <a:blip r:embed="rId2"/>
+          <a:stretch>
+            <a:fillRect/>
+          </a:stretch>
+        </p:blipFill>
+        <p:spPr>
+          <a:xfrm>
+            <a:off x="8275320" y="320040"/>
+            <a:ext cx="3657600" cy="3657600"/>
+          </a:xfrm>
+          <a:prstGeom prst="rect">
+            <a:avLst/>
+          </a:prstGeom>
+        </p:spPr>
+      </p:pic>
       <p:sp>
         <p:nvSpPr>
           <p:cNvPr id="4" name="TextBox 3"/>
@@ -3208,8 +3175,8 @@
         </p:nvSpPr>
         <p:spPr>
           <a:xfrm>
-            <a:off x="1600200" y="1965960"/>
-            <a:ext cx="10058400" cy="457200"/>
+            <a:off x="822960" y="1874519"/>
+            <a:ext cx="10515600" cy="457200"/>
           </a:xfrm>
           <a:prstGeom prst="rect">
             <a:avLst/>
@@ -3247,8 +3214,8 @@
         </p:nvSpPr>
         <p:spPr>
           <a:xfrm>
-            <a:off x="1600200" y="2514600"/>
-            <a:ext cx="10058400" cy="1737360"/>
+            <a:off x="822960" y="2423160"/>
+            <a:ext cx="10515600" cy="1737360"/>
           </a:xfrm>
           <a:prstGeom prst="rect">
             <a:avLst/>
@@ -3302,8 +3269,8 @@
         </p:nvSpPr>
         <p:spPr>
           <a:xfrm>
-            <a:off x="1600200" y="4434840"/>
-            <a:ext cx="9692640" cy="914400"/>
+            <a:off x="822960" y="4343400"/>
+            <a:ext cx="10424160" cy="914400"/>
           </a:xfrm>
           <a:prstGeom prst="rect">
             <a:avLst/>
@@ -3357,7 +3324,7 @@
         </p:nvSpPr>
         <p:spPr>
           <a:xfrm>
-            <a:off x="1600200" y="5989320"/>
+            <a:off x="822960" y="5989320"/>
             <a:ext cx="8229600" cy="457200"/>
           </a:xfrm>
           <a:prstGeom prst="rect">
